--- a/output_pptx/The_Blessing.pptx
+++ b/output_pptx/The_Blessing.pptx
@@ -3130,23 +3130,23 @@
         </p:nvSpPr>
         <p:spPr>
           <a:xfrm>
-            <a:off x="594360" y="1837944"/>
-            <a:ext cx="11002975" cy="685800"/>
-          </a:xfrm>
-          <a:prstGeom prst="rect">
-            <a:avLst/>
-          </a:prstGeom>
-          <a:noFill/>
-        </p:spPr>
-        <p:txBody>
-          <a:bodyPr wrap="square">
-            <a:spAutoFit/>
-          </a:bodyPr>
-          <a:lstStyle/>
-          <a:p>
-            <a:pPr algn="ctr"/>
-            <a:r>
-              <a:rPr sz="4400" b="1" i="0">
+            <a:off x="640080" y="1650492"/>
+            <a:ext cx="10911535" cy="731520"/>
+          </a:xfrm>
+          <a:prstGeom prst="rect">
+            <a:avLst/>
+          </a:prstGeom>
+          <a:noFill/>
+        </p:spPr>
+        <p:txBody>
+          <a:bodyPr wrap="square">
+            <a:spAutoFit/>
+          </a:bodyPr>
+          <a:lstStyle/>
+          <a:p>
+            <a:pPr algn="ctr"/>
+            <a:r>
+              <a:rPr sz="4800" b="1" i="0">
                 <a:solidFill>
                   <a:srgbClr val="FFFFFF"/>
                 </a:solidFill>
@@ -3165,8 +3165,8 @@
         </p:nvSpPr>
         <p:spPr>
           <a:xfrm>
-            <a:off x="594360" y="2560320"/>
-            <a:ext cx="11002975" cy="384048"/>
+            <a:off x="640080" y="2418588"/>
+            <a:ext cx="10911535" cy="365760"/>
           </a:xfrm>
           <a:prstGeom prst="rect">
             <a:avLst/>
@@ -3183,7 +3183,7 @@
             <a:r>
               <a:rPr sz="2400" b="0" i="1">
                 <a:solidFill>
-                  <a:srgbClr val="B4B4B4"/>
+                  <a:srgbClr val="AAAAAA"/>
                 </a:solidFill>
                 <a:latin typeface="Arial"/>
               </a:rPr>
@@ -3200,8 +3200,78 @@
         </p:nvSpPr>
         <p:spPr>
           <a:xfrm>
-            <a:off x="594360" y="2980944"/>
-            <a:ext cx="11002975" cy="347472"/>
+            <a:off x="640080" y="2985516"/>
+            <a:ext cx="10911535" cy="731520"/>
+          </a:xfrm>
+          <a:prstGeom prst="rect">
+            <a:avLst/>
+          </a:prstGeom>
+          <a:noFill/>
+        </p:spPr>
+        <p:txBody>
+          <a:bodyPr wrap="square">
+            <a:spAutoFit/>
+          </a:bodyPr>
+          <a:lstStyle/>
+          <a:p>
+            <a:pPr algn="ctr"/>
+            <a:r>
+              <a:rPr sz="4800" b="1" i="0">
+                <a:solidFill>
+                  <a:srgbClr val="FFFFFF"/>
+                </a:solidFill>
+                <a:latin typeface="Arial"/>
+              </a:rPr>
+              <a:t>祝福与え　守るように</a:t>
+            </a:r>
+          </a:p>
+        </p:txBody>
+      </p:sp>
+      <p:sp>
+        <p:nvSpPr>
+          <p:cNvPr id="5" name="TextBox 4"/>
+          <p:cNvSpPr txBox="1"/>
+          <p:nvPr/>
+        </p:nvSpPr>
+        <p:spPr>
+          <a:xfrm>
+            <a:off x="640080" y="3753612"/>
+            <a:ext cx="10911535" cy="365760"/>
+          </a:xfrm>
+          <a:prstGeom prst="rect">
+            <a:avLst/>
+          </a:prstGeom>
+          <a:noFill/>
+        </p:spPr>
+        <p:txBody>
+          <a:bodyPr wrap="square">
+            <a:spAutoFit/>
+          </a:bodyPr>
+          <a:lstStyle/>
+          <a:p>
+            <a:pPr algn="ctr"/>
+            <a:r>
+              <a:rPr sz="2400" b="0" i="1">
+                <a:solidFill>
+                  <a:srgbClr val="AAAAAA"/>
+                </a:solidFill>
+                <a:latin typeface="Arial"/>
+              </a:rPr>
+              <a:t>shukufuku atae mamoru youni</a:t>
+            </a:r>
+          </a:p>
+        </p:txBody>
+      </p:sp>
+      <p:sp>
+        <p:nvSpPr>
+          <p:cNvPr id="6" name="TextBox 5"/>
+          <p:cNvSpPr txBox="1"/>
+          <p:nvPr/>
+        </p:nvSpPr>
+        <p:spPr>
+          <a:xfrm>
+            <a:off x="640080" y="4530852"/>
+            <a:ext cx="10911535" cy="310896"/>
           </a:xfrm>
           <a:prstGeom prst="rect">
             <a:avLst/>
@@ -3218,81 +3288,11 @@
             <a:r>
               <a:rPr sz="2000" b="0" i="1">
                 <a:solidFill>
-                  <a:srgbClr val="8C8C8C"/>
-                </a:solidFill>
-                <a:latin typeface="Arial"/>
-              </a:rPr>
-              <a:t/>
-            </a:r>
-          </a:p>
-        </p:txBody>
-      </p:sp>
-      <p:sp>
-        <p:nvSpPr>
-          <p:cNvPr id="5" name="TextBox 4"/>
-          <p:cNvSpPr txBox="1"/>
-          <p:nvPr/>
-        </p:nvSpPr>
-        <p:spPr>
-          <a:xfrm>
-            <a:off x="594360" y="3529584"/>
-            <a:ext cx="11002975" cy="685800"/>
-          </a:xfrm>
-          <a:prstGeom prst="rect">
-            <a:avLst/>
-          </a:prstGeom>
-          <a:noFill/>
-        </p:spPr>
-        <p:txBody>
-          <a:bodyPr wrap="square">
-            <a:spAutoFit/>
-          </a:bodyPr>
-          <a:lstStyle/>
-          <a:p>
-            <a:pPr algn="ctr"/>
-            <a:r>
-              <a:rPr sz="4400" b="1" i="0">
-                <a:solidFill>
-                  <a:srgbClr val="FFFFFF"/>
-                </a:solidFill>
-                <a:latin typeface="Arial"/>
-              </a:rPr>
-              <a:t>祝福与え　守るように</a:t>
-            </a:r>
-          </a:p>
-        </p:txBody>
-      </p:sp>
-      <p:sp>
-        <p:nvSpPr>
-          <p:cNvPr id="6" name="TextBox 5"/>
-          <p:cNvSpPr txBox="1"/>
-          <p:nvPr/>
-        </p:nvSpPr>
-        <p:spPr>
-          <a:xfrm>
-            <a:off x="594360" y="4251960"/>
-            <a:ext cx="11002975" cy="384048"/>
-          </a:xfrm>
-          <a:prstGeom prst="rect">
-            <a:avLst/>
-          </a:prstGeom>
-          <a:noFill/>
-        </p:spPr>
-        <p:txBody>
-          <a:bodyPr wrap="square">
-            <a:spAutoFit/>
-          </a:bodyPr>
-          <a:lstStyle/>
-          <a:p>
-            <a:pPr algn="ctr"/>
-            <a:r>
-              <a:rPr sz="2400" b="0" i="1">
-                <a:solidFill>
-                  <a:srgbClr val="B4B4B4"/>
-                </a:solidFill>
-                <a:latin typeface="Arial"/>
-              </a:rPr>
-              <a:t>shukufuku atae mamoru youni</a:t>
+                  <a:srgbClr val="828282"/>
+                </a:solidFill>
+                <a:latin typeface="Arial"/>
+              </a:rPr>
+              <a:t>Até mil gerações</a:t>
             </a:r>
           </a:p>
         </p:txBody>
@@ -3305,8 +3305,8 @@
         </p:nvSpPr>
         <p:spPr>
           <a:xfrm>
-            <a:off x="594360" y="4672584"/>
-            <a:ext cx="11002975" cy="347472"/>
+            <a:off x="640080" y="4896612"/>
+            <a:ext cx="10911535" cy="310896"/>
           </a:xfrm>
           <a:prstGeom prst="rect">
             <a:avLst/>
@@ -3323,11 +3323,11 @@
             <a:r>
               <a:rPr sz="2000" b="0" i="1">
                 <a:solidFill>
-                  <a:srgbClr val="8C8C8C"/>
-                </a:solidFill>
-                <a:latin typeface="Arial"/>
-              </a:rPr>
-              <a:t/>
+                  <a:srgbClr val="828282"/>
+                </a:solidFill>
+                <a:latin typeface="Arial"/>
+              </a:rPr>
+              <a:t>Tua família e teus filhos</a:t>
             </a:r>
           </a:p>
         </p:txBody>
@@ -3366,23 +3366,23 @@
         </p:nvSpPr>
         <p:spPr>
           <a:xfrm>
-            <a:off x="594360" y="2258568"/>
-            <a:ext cx="11002975" cy="685800"/>
-          </a:xfrm>
-          <a:prstGeom prst="rect">
-            <a:avLst/>
-          </a:prstGeom>
-          <a:noFill/>
-        </p:spPr>
-        <p:txBody>
-          <a:bodyPr wrap="square">
-            <a:spAutoFit/>
-          </a:bodyPr>
-          <a:lstStyle/>
-          <a:p>
-            <a:pPr algn="ctr"/>
-            <a:r>
-              <a:rPr sz="4400" b="1" i="0">
+            <a:off x="640080" y="2052828"/>
+            <a:ext cx="10911535" cy="731520"/>
+          </a:xfrm>
+          <a:prstGeom prst="rect">
+            <a:avLst/>
+          </a:prstGeom>
+          <a:noFill/>
+        </p:spPr>
+        <p:txBody>
+          <a:bodyPr wrap="square">
+            <a:spAutoFit/>
+          </a:bodyPr>
+          <a:lstStyle/>
+          <a:p>
+            <a:pPr algn="ctr"/>
+            <a:r>
+              <a:rPr sz="4800" b="1" i="0">
                 <a:solidFill>
                   <a:srgbClr val="FFFFFF"/>
                 </a:solidFill>
@@ -3401,99 +3401,29 @@
         </p:nvSpPr>
         <p:spPr>
           <a:xfrm>
-            <a:off x="594360" y="2980944"/>
-            <a:ext cx="11002975" cy="347472"/>
-          </a:xfrm>
-          <a:prstGeom prst="rect">
-            <a:avLst/>
-          </a:prstGeom>
-          <a:noFill/>
-        </p:spPr>
-        <p:txBody>
-          <a:bodyPr wrap="square">
-            <a:spAutoFit/>
-          </a:bodyPr>
-          <a:lstStyle/>
-          <a:p>
-            <a:pPr algn="ctr"/>
-            <a:r>
-              <a:rPr sz="2200" b="0" i="1">
-                <a:solidFill>
-                  <a:srgbClr val="8C8C8C"/>
-                </a:solidFill>
-                <a:latin typeface="Arial"/>
-              </a:rPr>
-              <a:t/>
-            </a:r>
-          </a:p>
-        </p:txBody>
-      </p:sp>
-      <p:sp>
-        <p:nvSpPr>
-          <p:cNvPr id="4" name="TextBox 3"/>
-          <p:cNvSpPr txBox="1"/>
-          <p:nvPr/>
-        </p:nvSpPr>
-        <p:spPr>
-          <a:xfrm>
-            <a:off x="594360" y="3529584"/>
-            <a:ext cx="11002975" cy="685800"/>
-          </a:xfrm>
-          <a:prstGeom prst="rect">
-            <a:avLst/>
-          </a:prstGeom>
-          <a:noFill/>
-        </p:spPr>
-        <p:txBody>
-          <a:bodyPr wrap="square">
-            <a:spAutoFit/>
-          </a:bodyPr>
-          <a:lstStyle/>
-          <a:p>
-            <a:pPr algn="ctr"/>
-            <a:r>
-              <a:rPr sz="4400" b="1" i="0">
+            <a:off x="640080" y="2985516"/>
+            <a:ext cx="10911535" cy="731520"/>
+          </a:xfrm>
+          <a:prstGeom prst="rect">
+            <a:avLst/>
+          </a:prstGeom>
+          <a:noFill/>
+        </p:spPr>
+        <p:txBody>
+          <a:bodyPr wrap="square">
+            <a:spAutoFit/>
+          </a:bodyPr>
+          <a:lstStyle/>
+          <a:p>
+            <a:pPr algn="ctr"/>
+            <a:r>
+              <a:rPr sz="4800" b="1" i="0">
                 <a:solidFill>
                   <a:srgbClr val="FFFFFF"/>
                 </a:solidFill>
                 <a:latin typeface="Arial"/>
               </a:rPr>
               <a:t>Sua presença te acompanhe</a:t>
-            </a:r>
-          </a:p>
-        </p:txBody>
-      </p:sp>
-      <p:sp>
-        <p:nvSpPr>
-          <p:cNvPr id="5" name="TextBox 4"/>
-          <p:cNvSpPr txBox="1"/>
-          <p:nvPr/>
-        </p:nvSpPr>
-        <p:spPr>
-          <a:xfrm>
-            <a:off x="594360" y="4251960"/>
-            <a:ext cx="11002975" cy="347472"/>
-          </a:xfrm>
-          <a:prstGeom prst="rect">
-            <a:avLst/>
-          </a:prstGeom>
-          <a:noFill/>
-        </p:spPr>
-        <p:txBody>
-          <a:bodyPr wrap="square">
-            <a:spAutoFit/>
-          </a:bodyPr>
-          <a:lstStyle/>
-          <a:p>
-            <a:pPr algn="ctr"/>
-            <a:r>
-              <a:rPr sz="2200" b="0" i="1">
-                <a:solidFill>
-                  <a:srgbClr val="8C8C8C"/>
-                </a:solidFill>
-                <a:latin typeface="Arial"/>
-              </a:rPr>
-              <a:t/>
             </a:r>
           </a:p>
         </p:txBody>
@@ -3532,64 +3462,29 @@
         </p:nvSpPr>
         <p:spPr>
           <a:xfrm>
-            <a:off x="594360" y="2894076"/>
-            <a:ext cx="11002975" cy="685800"/>
-          </a:xfrm>
-          <a:prstGeom prst="rect">
-            <a:avLst/>
-          </a:prstGeom>
-          <a:noFill/>
-        </p:spPr>
-        <p:txBody>
-          <a:bodyPr wrap="square">
-            <a:spAutoFit/>
-          </a:bodyPr>
-          <a:lstStyle/>
-          <a:p>
-            <a:pPr algn="ctr"/>
-            <a:r>
-              <a:rPr sz="4400" b="1" i="0">
+            <a:off x="640080" y="2702052"/>
+            <a:ext cx="10911535" cy="731520"/>
+          </a:xfrm>
+          <a:prstGeom prst="rect">
+            <a:avLst/>
+          </a:prstGeom>
+          <a:noFill/>
+        </p:spPr>
+        <p:txBody>
+          <a:bodyPr wrap="square">
+            <a:spAutoFit/>
+          </a:bodyPr>
+          <a:lstStyle/>
+          <a:p>
+            <a:pPr algn="ctr"/>
+            <a:r>
+              <a:rPr sz="4800" b="1" i="0">
                 <a:solidFill>
                   <a:srgbClr val="FFFFFF"/>
                 </a:solidFill>
                 <a:latin typeface="Arial"/>
               </a:rPr>
               <a:t>Por detrás, por diante</a:t>
-            </a:r>
-          </a:p>
-        </p:txBody>
-      </p:sp>
-      <p:sp>
-        <p:nvSpPr>
-          <p:cNvPr id="3" name="TextBox 2"/>
-          <p:cNvSpPr txBox="1"/>
-          <p:nvPr/>
-        </p:nvSpPr>
-        <p:spPr>
-          <a:xfrm>
-            <a:off x="594360" y="3616452"/>
-            <a:ext cx="11002975" cy="347472"/>
-          </a:xfrm>
-          <a:prstGeom prst="rect">
-            <a:avLst/>
-          </a:prstGeom>
-          <a:noFill/>
-        </p:spPr>
-        <p:txBody>
-          <a:bodyPr wrap="square">
-            <a:spAutoFit/>
-          </a:bodyPr>
-          <a:lstStyle/>
-          <a:p>
-            <a:pPr algn="ctr"/>
-            <a:r>
-              <a:rPr sz="2200" b="0" i="1">
-                <a:solidFill>
-                  <a:srgbClr val="8C8C8C"/>
-                </a:solidFill>
-                <a:latin typeface="Arial"/>
-              </a:rPr>
-              <a:t/>
             </a:r>
           </a:p>
         </p:txBody>
@@ -3628,23 +3523,23 @@
         </p:nvSpPr>
         <p:spPr>
           <a:xfrm>
-            <a:off x="594360" y="2258568"/>
-            <a:ext cx="11002975" cy="685800"/>
-          </a:xfrm>
-          <a:prstGeom prst="rect">
-            <a:avLst/>
-          </a:prstGeom>
-          <a:noFill/>
-        </p:spPr>
-        <p:txBody>
-          <a:bodyPr wrap="square">
-            <a:spAutoFit/>
-          </a:bodyPr>
-          <a:lstStyle/>
-          <a:p>
-            <a:pPr algn="ctr"/>
-            <a:r>
-              <a:rPr sz="4400" b="1" i="0">
+            <a:off x="640080" y="2052828"/>
+            <a:ext cx="10911535" cy="731520"/>
+          </a:xfrm>
+          <a:prstGeom prst="rect">
+            <a:avLst/>
+          </a:prstGeom>
+          <a:noFill/>
+        </p:spPr>
+        <p:txBody>
+          <a:bodyPr wrap="square">
+            <a:spAutoFit/>
+          </a:bodyPr>
+          <a:lstStyle/>
+          <a:p>
+            <a:pPr algn="ctr"/>
+            <a:r>
+              <a:rPr sz="4800" b="1" i="0">
                 <a:solidFill>
                   <a:srgbClr val="FFFFFF"/>
                 </a:solidFill>
@@ -3663,99 +3558,29 @@
         </p:nvSpPr>
         <p:spPr>
           <a:xfrm>
-            <a:off x="594360" y="2980944"/>
-            <a:ext cx="11002975" cy="347472"/>
-          </a:xfrm>
-          <a:prstGeom prst="rect">
-            <a:avLst/>
-          </a:prstGeom>
-          <a:noFill/>
-        </p:spPr>
-        <p:txBody>
-          <a:bodyPr wrap="square">
-            <a:spAutoFit/>
-          </a:bodyPr>
-          <a:lstStyle/>
-          <a:p>
-            <a:pPr algn="ctr"/>
-            <a:r>
-              <a:rPr sz="2200" b="0" i="1">
-                <a:solidFill>
-                  <a:srgbClr val="8C8C8C"/>
-                </a:solidFill>
-                <a:latin typeface="Arial"/>
-              </a:rPr>
-              <a:t/>
-            </a:r>
-          </a:p>
-        </p:txBody>
-      </p:sp>
-      <p:sp>
-        <p:nvSpPr>
-          <p:cNvPr id="4" name="TextBox 3"/>
-          <p:cNvSpPr txBox="1"/>
-          <p:nvPr/>
-        </p:nvSpPr>
-        <p:spPr>
-          <a:xfrm>
-            <a:off x="594360" y="3529584"/>
-            <a:ext cx="11002975" cy="685800"/>
-          </a:xfrm>
-          <a:prstGeom prst="rect">
-            <a:avLst/>
-          </a:prstGeom>
-          <a:noFill/>
-        </p:spPr>
-        <p:txBody>
-          <a:bodyPr wrap="square">
-            <a:spAutoFit/>
-          </a:bodyPr>
-          <a:lstStyle/>
-          <a:p>
-            <a:pPr algn="ctr"/>
-            <a:r>
-              <a:rPr sz="4400" b="1" i="0">
+            <a:off x="640080" y="2985516"/>
+            <a:ext cx="10911535" cy="731520"/>
+          </a:xfrm>
+          <a:prstGeom prst="rect">
+            <a:avLst/>
+          </a:prstGeom>
+          <a:noFill/>
+        </p:spPr>
+        <p:txBody>
+          <a:bodyPr wrap="square">
+            <a:spAutoFit/>
+          </a:bodyPr>
+          <a:lstStyle/>
+          <a:p>
+            <a:pPr algn="ctr"/>
+            <a:r>
+              <a:rPr sz="4800" b="1" i="0">
                 <a:solidFill>
                   <a:srgbClr val="FFFFFF"/>
                 </a:solidFill>
                 <a:latin typeface="Arial"/>
               </a:rPr>
               <a:t>E faça brilhar Seu rosto em ti</a:t>
-            </a:r>
-          </a:p>
-        </p:txBody>
-      </p:sp>
-      <p:sp>
-        <p:nvSpPr>
-          <p:cNvPr id="5" name="TextBox 4"/>
-          <p:cNvSpPr txBox="1"/>
-          <p:nvPr/>
-        </p:nvSpPr>
-        <p:spPr>
-          <a:xfrm>
-            <a:off x="594360" y="4251960"/>
-            <a:ext cx="11002975" cy="347472"/>
-          </a:xfrm>
-          <a:prstGeom prst="rect">
-            <a:avLst/>
-          </a:prstGeom>
-          <a:noFill/>
-        </p:spPr>
-        <p:txBody>
-          <a:bodyPr wrap="square">
-            <a:spAutoFit/>
-          </a:bodyPr>
-          <a:lstStyle/>
-          <a:p>
-            <a:pPr algn="ctr"/>
-            <a:r>
-              <a:rPr sz="2200" b="0" i="1">
-                <a:solidFill>
-                  <a:srgbClr val="8C8C8C"/>
-                </a:solidFill>
-                <a:latin typeface="Arial"/>
-              </a:rPr>
-              <a:t/>
             </a:r>
           </a:p>
         </p:txBody>
@@ -3794,23 +3619,23 @@
         </p:nvSpPr>
         <p:spPr>
           <a:xfrm>
-            <a:off x="594360" y="2258568"/>
-            <a:ext cx="11002975" cy="685800"/>
-          </a:xfrm>
-          <a:prstGeom prst="rect">
-            <a:avLst/>
-          </a:prstGeom>
-          <a:noFill/>
-        </p:spPr>
-        <p:txBody>
-          <a:bodyPr wrap="square">
-            <a:spAutoFit/>
-          </a:bodyPr>
-          <a:lstStyle/>
-          <a:p>
-            <a:pPr algn="ctr"/>
-            <a:r>
-              <a:rPr sz="4400" b="1" i="0">
+            <a:off x="640080" y="2052828"/>
+            <a:ext cx="10911535" cy="731520"/>
+          </a:xfrm>
+          <a:prstGeom prst="rect">
+            <a:avLst/>
+          </a:prstGeom>
+          <a:noFill/>
+        </p:spPr>
+        <p:txBody>
+          <a:bodyPr wrap="square">
+            <a:spAutoFit/>
+          </a:bodyPr>
+          <a:lstStyle/>
+          <a:p>
+            <a:pPr algn="ctr"/>
+            <a:r>
+              <a:rPr sz="4800" b="1" i="0">
                 <a:solidFill>
                   <a:srgbClr val="FFFFFF"/>
                 </a:solidFill>
@@ -3829,99 +3654,29 @@
         </p:nvSpPr>
         <p:spPr>
           <a:xfrm>
-            <a:off x="594360" y="2980944"/>
-            <a:ext cx="11002975" cy="347472"/>
-          </a:xfrm>
-          <a:prstGeom prst="rect">
-            <a:avLst/>
-          </a:prstGeom>
-          <a:noFill/>
-        </p:spPr>
-        <p:txBody>
-          <a:bodyPr wrap="square">
-            <a:spAutoFit/>
-          </a:bodyPr>
-          <a:lstStyle/>
-          <a:p>
-            <a:pPr algn="ctr"/>
-            <a:r>
-              <a:rPr sz="2200" b="0" i="1">
-                <a:solidFill>
-                  <a:srgbClr val="8C8C8C"/>
-                </a:solidFill>
-                <a:latin typeface="Arial"/>
-              </a:rPr>
-              <a:t/>
-            </a:r>
-          </a:p>
-        </p:txBody>
-      </p:sp>
-      <p:sp>
-        <p:nvSpPr>
-          <p:cNvPr id="4" name="TextBox 3"/>
-          <p:cNvSpPr txBox="1"/>
-          <p:nvPr/>
-        </p:nvSpPr>
-        <p:spPr>
-          <a:xfrm>
-            <a:off x="594360" y="3529584"/>
-            <a:ext cx="11002975" cy="685800"/>
-          </a:xfrm>
-          <a:prstGeom prst="rect">
-            <a:avLst/>
-          </a:prstGeom>
-          <a:noFill/>
-        </p:spPr>
-        <p:txBody>
-          <a:bodyPr wrap="square">
-            <a:spAutoFit/>
-          </a:bodyPr>
-          <a:lstStyle/>
-          <a:p>
-            <a:pPr algn="ctr"/>
-            <a:r>
-              <a:rPr sz="4400" b="1" i="0">
+            <a:off x="640080" y="2985516"/>
+            <a:ext cx="10911535" cy="731520"/>
+          </a:xfrm>
+          <a:prstGeom prst="rect">
+            <a:avLst/>
+          </a:prstGeom>
+          <a:noFill/>
+        </p:spPr>
+        <p:txBody>
+          <a:bodyPr wrap="square">
+            <a:spAutoFit/>
+          </a:bodyPr>
+          <a:lstStyle/>
+          <a:p>
+            <a:pPr algn="ctr"/>
+            <a:r>
+              <a:rPr sz="4800" b="1" i="0">
                 <a:solidFill>
                   <a:srgbClr val="FFFFFF"/>
                 </a:solidFill>
                 <a:latin typeface="Arial"/>
               </a:rPr>
               <a:t>Que a bênção se derrame</a:t>
-            </a:r>
-          </a:p>
-        </p:txBody>
-      </p:sp>
-      <p:sp>
-        <p:nvSpPr>
-          <p:cNvPr id="5" name="TextBox 4"/>
-          <p:cNvSpPr txBox="1"/>
-          <p:nvPr/>
-        </p:nvSpPr>
-        <p:spPr>
-          <a:xfrm>
-            <a:off x="594360" y="4251960"/>
-            <a:ext cx="11002975" cy="347472"/>
-          </a:xfrm>
-          <a:prstGeom prst="rect">
-            <a:avLst/>
-          </a:prstGeom>
-          <a:noFill/>
-        </p:spPr>
-        <p:txBody>
-          <a:bodyPr wrap="square">
-            <a:spAutoFit/>
-          </a:bodyPr>
-          <a:lstStyle/>
-          <a:p>
-            <a:pPr algn="ctr"/>
-            <a:r>
-              <a:rPr sz="2200" b="0" i="1">
-                <a:solidFill>
-                  <a:srgbClr val="8C8C8C"/>
-                </a:solidFill>
-                <a:latin typeface="Arial"/>
-              </a:rPr>
-              <a:t/>
             </a:r>
           </a:p>
         </p:txBody>
@@ -3960,23 +3715,23 @@
         </p:nvSpPr>
         <p:spPr>
           <a:xfrm>
-            <a:off x="594360" y="2258568"/>
-            <a:ext cx="11002975" cy="685800"/>
-          </a:xfrm>
-          <a:prstGeom prst="rect">
-            <a:avLst/>
-          </a:prstGeom>
-          <a:noFill/>
-        </p:spPr>
-        <p:txBody>
-          <a:bodyPr wrap="square">
-            <a:spAutoFit/>
-          </a:bodyPr>
-          <a:lstStyle/>
-          <a:p>
-            <a:pPr algn="ctr"/>
-            <a:r>
-              <a:rPr sz="4400" b="1" i="0">
+            <a:off x="640080" y="2052828"/>
+            <a:ext cx="10911535" cy="731520"/>
+          </a:xfrm>
+          <a:prstGeom prst="rect">
+            <a:avLst/>
+          </a:prstGeom>
+          <a:noFill/>
+        </p:spPr>
+        <p:txBody>
+          <a:bodyPr wrap="square">
+            <a:spAutoFit/>
+          </a:bodyPr>
+          <a:lstStyle/>
+          <a:p>
+            <a:pPr algn="ctr"/>
+            <a:r>
+              <a:rPr sz="4800" b="1" i="0">
                 <a:solidFill>
                   <a:srgbClr val="FFFFFF"/>
                 </a:solidFill>
@@ -3995,99 +3750,29 @@
         </p:nvSpPr>
         <p:spPr>
           <a:xfrm>
-            <a:off x="594360" y="2980944"/>
-            <a:ext cx="11002975" cy="347472"/>
-          </a:xfrm>
-          <a:prstGeom prst="rect">
-            <a:avLst/>
-          </a:prstGeom>
-          <a:noFill/>
-        </p:spPr>
-        <p:txBody>
-          <a:bodyPr wrap="square">
-            <a:spAutoFit/>
-          </a:bodyPr>
-          <a:lstStyle/>
-          <a:p>
-            <a:pPr algn="ctr"/>
-            <a:r>
-              <a:rPr sz="2200" b="0" i="1">
-                <a:solidFill>
-                  <a:srgbClr val="8C8C8C"/>
-                </a:solidFill>
-                <a:latin typeface="Arial"/>
-              </a:rPr>
-              <a:t/>
-            </a:r>
-          </a:p>
-        </p:txBody>
-      </p:sp>
-      <p:sp>
-        <p:nvSpPr>
-          <p:cNvPr id="4" name="TextBox 3"/>
-          <p:cNvSpPr txBox="1"/>
-          <p:nvPr/>
-        </p:nvSpPr>
-        <p:spPr>
-          <a:xfrm>
-            <a:off x="594360" y="3529584"/>
-            <a:ext cx="11002975" cy="685800"/>
-          </a:xfrm>
-          <a:prstGeom prst="rect">
-            <a:avLst/>
-          </a:prstGeom>
-          <a:noFill/>
-        </p:spPr>
-        <p:txBody>
-          <a:bodyPr wrap="square">
-            <a:spAutoFit/>
-          </a:bodyPr>
-          <a:lstStyle/>
-          <a:p>
-            <a:pPr algn="ctr"/>
-            <a:r>
-              <a:rPr sz="4400" b="1" i="0">
+            <a:off x="640080" y="2985516"/>
+            <a:ext cx="10911535" cy="731520"/>
+          </a:xfrm>
+          <a:prstGeom prst="rect">
+            <a:avLst/>
+          </a:prstGeom>
+          <a:noFill/>
+        </p:spPr>
+        <p:txBody>
+          <a:bodyPr wrap="square">
+            <a:spAutoFit/>
+          </a:bodyPr>
+          <a:lstStyle/>
+          <a:p>
+            <a:pPr algn="ctr"/>
+            <a:r>
+              <a:rPr sz="4800" b="1" i="0">
                 <a:solidFill>
                   <a:srgbClr val="FFFFFF"/>
                 </a:solidFill>
                 <a:latin typeface="Arial"/>
               </a:rPr>
               <a:t>Tua entrada e saída</a:t>
-            </a:r>
-          </a:p>
-        </p:txBody>
-      </p:sp>
-      <p:sp>
-        <p:nvSpPr>
-          <p:cNvPr id="5" name="TextBox 4"/>
-          <p:cNvSpPr txBox="1"/>
-          <p:nvPr/>
-        </p:nvSpPr>
-        <p:spPr>
-          <a:xfrm>
-            <a:off x="594360" y="4251960"/>
-            <a:ext cx="11002975" cy="347472"/>
-          </a:xfrm>
-          <a:prstGeom prst="rect">
-            <a:avLst/>
-          </a:prstGeom>
-          <a:noFill/>
-        </p:spPr>
-        <p:txBody>
-          <a:bodyPr wrap="square">
-            <a:spAutoFit/>
-          </a:bodyPr>
-          <a:lstStyle/>
-          <a:p>
-            <a:pPr algn="ctr"/>
-            <a:r>
-              <a:rPr sz="2200" b="0" i="1">
-                <a:solidFill>
-                  <a:srgbClr val="8C8C8C"/>
-                </a:solidFill>
-                <a:latin typeface="Arial"/>
-              </a:rPr>
-              <a:t/>
             </a:r>
           </a:p>
         </p:txBody>
@@ -4126,23 +3811,23 @@
         </p:nvSpPr>
         <p:spPr>
           <a:xfrm>
-            <a:off x="594360" y="2258568"/>
-            <a:ext cx="11002975" cy="685800"/>
-          </a:xfrm>
-          <a:prstGeom prst="rect">
-            <a:avLst/>
-          </a:prstGeom>
-          <a:noFill/>
-        </p:spPr>
-        <p:txBody>
-          <a:bodyPr wrap="square">
-            <a:spAutoFit/>
-          </a:bodyPr>
-          <a:lstStyle/>
-          <a:p>
-            <a:pPr algn="ctr"/>
-            <a:r>
-              <a:rPr sz="4400" b="1" i="0">
+            <a:off x="640080" y="2052828"/>
+            <a:ext cx="10911535" cy="731520"/>
+          </a:xfrm>
+          <a:prstGeom prst="rect">
+            <a:avLst/>
+          </a:prstGeom>
+          <a:noFill/>
+        </p:spPr>
+        <p:txBody>
+          <a:bodyPr wrap="square">
+            <a:spAutoFit/>
+          </a:bodyPr>
+          <a:lstStyle/>
+          <a:p>
+            <a:pPr algn="ctr"/>
+            <a:r>
+              <a:rPr sz="4800" b="1" i="0">
                 <a:solidFill>
                   <a:srgbClr val="FFFFFF"/>
                 </a:solidFill>
@@ -4161,99 +3846,29 @@
         </p:nvSpPr>
         <p:spPr>
           <a:xfrm>
-            <a:off x="594360" y="2980944"/>
-            <a:ext cx="11002975" cy="347472"/>
-          </a:xfrm>
-          <a:prstGeom prst="rect">
-            <a:avLst/>
-          </a:prstGeom>
-          <a:noFill/>
-        </p:spPr>
-        <p:txBody>
-          <a:bodyPr wrap="square">
-            <a:spAutoFit/>
-          </a:bodyPr>
-          <a:lstStyle/>
-          <a:p>
-            <a:pPr algn="ctr"/>
-            <a:r>
-              <a:rPr sz="2200" b="0" i="1">
-                <a:solidFill>
-                  <a:srgbClr val="8C8C8C"/>
-                </a:solidFill>
-                <a:latin typeface="Arial"/>
-              </a:rPr>
-              <a:t/>
-            </a:r>
-          </a:p>
-        </p:txBody>
-      </p:sp>
-      <p:sp>
-        <p:nvSpPr>
-          <p:cNvPr id="4" name="TextBox 3"/>
-          <p:cNvSpPr txBox="1"/>
-          <p:nvPr/>
-        </p:nvSpPr>
-        <p:spPr>
-          <a:xfrm>
-            <a:off x="594360" y="3529584"/>
-            <a:ext cx="11002975" cy="685800"/>
-          </a:xfrm>
-          <a:prstGeom prst="rect">
-            <a:avLst/>
-          </a:prstGeom>
-          <a:noFill/>
-        </p:spPr>
-        <p:txBody>
-          <a:bodyPr wrap="square">
-            <a:spAutoFit/>
-          </a:bodyPr>
-          <a:lstStyle/>
-          <a:p>
-            <a:pPr algn="ctr"/>
-            <a:r>
-              <a:rPr sz="4400" b="1" i="0">
+            <a:off x="640080" y="2985516"/>
+            <a:ext cx="10911535" cy="731520"/>
+          </a:xfrm>
+          <a:prstGeom prst="rect">
+            <a:avLst/>
+          </a:prstGeom>
+          <a:noFill/>
+        </p:spPr>
+        <p:txBody>
+          <a:bodyPr wrap="square">
+            <a:spAutoFit/>
+          </a:bodyPr>
+          <a:lstStyle/>
+          <a:p>
+            <a:pPr algn="ctr"/>
+            <a:r>
+              <a:rPr sz="4800" b="1" i="0">
                 <a:solidFill>
                   <a:srgbClr val="FFFFFF"/>
                 </a:solidFill>
                 <a:latin typeface="Arial"/>
               </a:rPr>
               <a:t>É contigo, é por ti</a:t>
-            </a:r>
-          </a:p>
-        </p:txBody>
-      </p:sp>
-      <p:sp>
-        <p:nvSpPr>
-          <p:cNvPr id="5" name="TextBox 4"/>
-          <p:cNvSpPr txBox="1"/>
-          <p:nvPr/>
-        </p:nvSpPr>
-        <p:spPr>
-          <a:xfrm>
-            <a:off x="594360" y="4251960"/>
-            <a:ext cx="11002975" cy="347472"/>
-          </a:xfrm>
-          <a:prstGeom prst="rect">
-            <a:avLst/>
-          </a:prstGeom>
-          <a:noFill/>
-        </p:spPr>
-        <p:txBody>
-          <a:bodyPr wrap="square">
-            <a:spAutoFit/>
-          </a:bodyPr>
-          <a:lstStyle/>
-          <a:p>
-            <a:pPr algn="ctr"/>
-            <a:r>
-              <a:rPr sz="2200" b="0" i="1">
-                <a:solidFill>
-                  <a:srgbClr val="8C8C8C"/>
-                </a:solidFill>
-                <a:latin typeface="Arial"/>
-              </a:rPr>
-              <a:t/>
             </a:r>
           </a:p>
         </p:txBody>
@@ -4292,23 +3907,23 @@
         </p:nvSpPr>
         <p:spPr>
           <a:xfrm>
-            <a:off x="594360" y="1837944"/>
-            <a:ext cx="11002975" cy="685800"/>
-          </a:xfrm>
-          <a:prstGeom prst="rect">
-            <a:avLst/>
-          </a:prstGeom>
-          <a:noFill/>
-        </p:spPr>
-        <p:txBody>
-          <a:bodyPr wrap="square">
-            <a:spAutoFit/>
-          </a:bodyPr>
-          <a:lstStyle/>
-          <a:p>
-            <a:pPr algn="ctr"/>
-            <a:r>
-              <a:rPr sz="4400" b="1" i="0">
+            <a:off x="640080" y="1650492"/>
+            <a:ext cx="10911535" cy="731520"/>
+          </a:xfrm>
+          <a:prstGeom prst="rect">
+            <a:avLst/>
+          </a:prstGeom>
+          <a:noFill/>
+        </p:spPr>
+        <p:txBody>
+          <a:bodyPr wrap="square">
+            <a:spAutoFit/>
+          </a:bodyPr>
+          <a:lstStyle/>
+          <a:p>
+            <a:pPr algn="ctr"/>
+            <a:r>
+              <a:rPr sz="4800" b="1" i="0">
                 <a:solidFill>
                   <a:srgbClr val="FFFFFF"/>
                 </a:solidFill>
@@ -4327,8 +3942,8 @@
         </p:nvSpPr>
         <p:spPr>
           <a:xfrm>
-            <a:off x="594360" y="2560320"/>
-            <a:ext cx="11002975" cy="384048"/>
+            <a:off x="640080" y="2418588"/>
+            <a:ext cx="10911535" cy="365760"/>
           </a:xfrm>
           <a:prstGeom prst="rect">
             <a:avLst/>
@@ -4345,7 +3960,7 @@
             <a:r>
               <a:rPr sz="2400" b="0" i="1">
                 <a:solidFill>
-                  <a:srgbClr val="B4B4B4"/>
+                  <a:srgbClr val="AAAAAA"/>
                 </a:solidFill>
                 <a:latin typeface="Arial"/>
               </a:rPr>
@@ -4362,29 +3977,29 @@
         </p:nvSpPr>
         <p:spPr>
           <a:xfrm>
-            <a:off x="594360" y="2980944"/>
-            <a:ext cx="11002975" cy="347472"/>
-          </a:xfrm>
-          <a:prstGeom prst="rect">
-            <a:avLst/>
-          </a:prstGeom>
-          <a:noFill/>
-        </p:spPr>
-        <p:txBody>
-          <a:bodyPr wrap="square">
-            <a:spAutoFit/>
-          </a:bodyPr>
-          <a:lstStyle/>
-          <a:p>
-            <a:pPr algn="ctr"/>
-            <a:r>
-              <a:rPr sz="2000" b="0" i="1">
-                <a:solidFill>
-                  <a:srgbClr val="8C8C8C"/>
-                </a:solidFill>
-                <a:latin typeface="Arial"/>
-              </a:rPr>
-              <a:t/>
+            <a:off x="640080" y="2985516"/>
+            <a:ext cx="10911535" cy="731520"/>
+          </a:xfrm>
+          <a:prstGeom prst="rect">
+            <a:avLst/>
+          </a:prstGeom>
+          <a:noFill/>
+        </p:spPr>
+        <p:txBody>
+          <a:bodyPr wrap="square">
+            <a:spAutoFit/>
+          </a:bodyPr>
+          <a:lstStyle/>
+          <a:p>
+            <a:pPr algn="ctr"/>
+            <a:r>
+              <a:rPr sz="4800" b="1" i="0">
+                <a:solidFill>
+                  <a:srgbClr val="FFFFFF"/>
+                </a:solidFill>
+                <a:latin typeface="Arial"/>
+              </a:rPr>
+              <a:t>彼らの子供に</a:t>
             </a:r>
           </a:p>
         </p:txBody>
@@ -4397,43 +4012,8 @@
         </p:nvSpPr>
         <p:spPr>
           <a:xfrm>
-            <a:off x="594360" y="3529584"/>
-            <a:ext cx="11002975" cy="685800"/>
-          </a:xfrm>
-          <a:prstGeom prst="rect">
-            <a:avLst/>
-          </a:prstGeom>
-          <a:noFill/>
-        </p:spPr>
-        <p:txBody>
-          <a:bodyPr wrap="square">
-            <a:spAutoFit/>
-          </a:bodyPr>
-          <a:lstStyle/>
-          <a:p>
-            <a:pPr algn="ctr"/>
-            <a:r>
-              <a:rPr sz="4400" b="1" i="0">
-                <a:solidFill>
-                  <a:srgbClr val="FFFFFF"/>
-                </a:solidFill>
-                <a:latin typeface="Arial"/>
-              </a:rPr>
-              <a:t>彼らの子供に</a:t>
-            </a:r>
-          </a:p>
-        </p:txBody>
-      </p:sp>
-      <p:sp>
-        <p:nvSpPr>
-          <p:cNvPr id="6" name="TextBox 5"/>
-          <p:cNvSpPr txBox="1"/>
-          <p:nvPr/>
-        </p:nvSpPr>
-        <p:spPr>
-          <a:xfrm>
-            <a:off x="594360" y="4251960"/>
-            <a:ext cx="11002975" cy="384048"/>
+            <a:off x="640080" y="3753612"/>
+            <a:ext cx="10911535" cy="365760"/>
           </a:xfrm>
           <a:prstGeom prst="rect">
             <a:avLst/>
@@ -4450,46 +4030,11 @@
             <a:r>
               <a:rPr sz="2400" b="0" i="1">
                 <a:solidFill>
-                  <a:srgbClr val="B4B4B4"/>
+                  <a:srgbClr val="AAAAAA"/>
                 </a:solidFill>
                 <a:latin typeface="Arial"/>
               </a:rPr>
               <a:t>karera no kodomo ni</a:t>
-            </a:r>
-          </a:p>
-        </p:txBody>
-      </p:sp>
-      <p:sp>
-        <p:nvSpPr>
-          <p:cNvPr id="7" name="TextBox 6"/>
-          <p:cNvSpPr txBox="1"/>
-          <p:nvPr/>
-        </p:nvSpPr>
-        <p:spPr>
-          <a:xfrm>
-            <a:off x="594360" y="4672584"/>
-            <a:ext cx="11002975" cy="347472"/>
-          </a:xfrm>
-          <a:prstGeom prst="rect">
-            <a:avLst/>
-          </a:prstGeom>
-          <a:noFill/>
-        </p:spPr>
-        <p:txBody>
-          <a:bodyPr wrap="square">
-            <a:spAutoFit/>
-          </a:bodyPr>
-          <a:lstStyle/>
-          <a:p>
-            <a:pPr algn="ctr"/>
-            <a:r>
-              <a:rPr sz="2000" b="0" i="1">
-                <a:solidFill>
-                  <a:srgbClr val="8C8C8C"/>
-                </a:solidFill>
-                <a:latin typeface="Arial"/>
-              </a:rPr>
-              <a:t/>
             </a:r>
           </a:p>
         </p:txBody>
@@ -4528,23 +4073,23 @@
         </p:nvSpPr>
         <p:spPr>
           <a:xfrm>
-            <a:off x="594360" y="1837944"/>
-            <a:ext cx="11002975" cy="685800"/>
-          </a:xfrm>
-          <a:prstGeom prst="rect">
-            <a:avLst/>
-          </a:prstGeom>
-          <a:noFill/>
-        </p:spPr>
-        <p:txBody>
-          <a:bodyPr wrap="square">
-            <a:spAutoFit/>
-          </a:bodyPr>
-          <a:lstStyle/>
-          <a:p>
-            <a:pPr algn="ctr"/>
-            <a:r>
-              <a:rPr sz="4400" b="1" i="0">
+            <a:off x="640080" y="1650492"/>
+            <a:ext cx="10911535" cy="731520"/>
+          </a:xfrm>
+          <a:prstGeom prst="rect">
+            <a:avLst/>
+          </a:prstGeom>
+          <a:noFill/>
+        </p:spPr>
+        <p:txBody>
+          <a:bodyPr wrap="square">
+            <a:spAutoFit/>
+          </a:bodyPr>
+          <a:lstStyle/>
+          <a:p>
+            <a:pPr algn="ctr"/>
+            <a:r>
+              <a:rPr sz="4800" b="1" i="0">
                 <a:solidFill>
                   <a:srgbClr val="FFFFFF"/>
                 </a:solidFill>
@@ -4563,8 +4108,8 @@
         </p:nvSpPr>
         <p:spPr>
           <a:xfrm>
-            <a:off x="594360" y="2560320"/>
-            <a:ext cx="11002975" cy="384048"/>
+            <a:off x="640080" y="2418588"/>
+            <a:ext cx="10911535" cy="365760"/>
           </a:xfrm>
           <a:prstGeom prst="rect">
             <a:avLst/>
@@ -4581,7 +4126,7 @@
             <a:r>
               <a:rPr sz="2400" b="0" i="1">
                 <a:solidFill>
-                  <a:srgbClr val="B4B4B4"/>
+                  <a:srgbClr val="AAAAAA"/>
                 </a:solidFill>
                 <a:latin typeface="Arial"/>
               </a:rPr>
@@ -4598,29 +4143,29 @@
         </p:nvSpPr>
         <p:spPr>
           <a:xfrm>
-            <a:off x="594360" y="2980944"/>
-            <a:ext cx="11002975" cy="347472"/>
-          </a:xfrm>
-          <a:prstGeom prst="rect">
-            <a:avLst/>
-          </a:prstGeom>
-          <a:noFill/>
-        </p:spPr>
-        <p:txBody>
-          <a:bodyPr wrap="square">
-            <a:spAutoFit/>
-          </a:bodyPr>
-          <a:lstStyle/>
-          <a:p>
-            <a:pPr algn="ctr"/>
-            <a:r>
-              <a:rPr sz="2000" b="0" i="1">
-                <a:solidFill>
-                  <a:srgbClr val="8C8C8C"/>
-                </a:solidFill>
-                <a:latin typeface="Arial"/>
-              </a:rPr>
-              <a:t/>
+            <a:off x="640080" y="2985516"/>
+            <a:ext cx="10911535" cy="731520"/>
+          </a:xfrm>
+          <a:prstGeom prst="rect">
+            <a:avLst/>
+          </a:prstGeom>
+          <a:noFill/>
+        </p:spPr>
+        <p:txBody>
+          <a:bodyPr wrap="square">
+            <a:spAutoFit/>
+          </a:bodyPr>
+          <a:lstStyle/>
+          <a:p>
+            <a:pPr algn="ctr"/>
+            <a:r>
+              <a:rPr sz="4800" b="1" i="0">
+                <a:solidFill>
+                  <a:srgbClr val="FFFFFF"/>
+                </a:solidFill>
+                <a:latin typeface="Arial"/>
+              </a:rPr>
+              <a:t>祝福あるように</a:t>
             </a:r>
           </a:p>
         </p:txBody>
@@ -4633,43 +4178,8 @@
         </p:nvSpPr>
         <p:spPr>
           <a:xfrm>
-            <a:off x="594360" y="3529584"/>
-            <a:ext cx="11002975" cy="685800"/>
-          </a:xfrm>
-          <a:prstGeom prst="rect">
-            <a:avLst/>
-          </a:prstGeom>
-          <a:noFill/>
-        </p:spPr>
-        <p:txBody>
-          <a:bodyPr wrap="square">
-            <a:spAutoFit/>
-          </a:bodyPr>
-          <a:lstStyle/>
-          <a:p>
-            <a:pPr algn="ctr"/>
-            <a:r>
-              <a:rPr sz="4400" b="1" i="0">
-                <a:solidFill>
-                  <a:srgbClr val="FFFFFF"/>
-                </a:solidFill>
-                <a:latin typeface="Arial"/>
-              </a:rPr>
-              <a:t>祝福あるように</a:t>
-            </a:r>
-          </a:p>
-        </p:txBody>
-      </p:sp>
-      <p:sp>
-        <p:nvSpPr>
-          <p:cNvPr id="6" name="TextBox 5"/>
-          <p:cNvSpPr txBox="1"/>
-          <p:nvPr/>
-        </p:nvSpPr>
-        <p:spPr>
-          <a:xfrm>
-            <a:off x="594360" y="4251960"/>
-            <a:ext cx="11002975" cy="384048"/>
+            <a:off x="640080" y="3753612"/>
+            <a:ext cx="10911535" cy="365760"/>
           </a:xfrm>
           <a:prstGeom prst="rect">
             <a:avLst/>
@@ -4686,46 +4196,11 @@
             <a:r>
               <a:rPr sz="2400" b="0" i="1">
                 <a:solidFill>
-                  <a:srgbClr val="B4B4B4"/>
+                  <a:srgbClr val="AAAAAA"/>
                 </a:solidFill>
                 <a:latin typeface="Arial"/>
               </a:rPr>
               <a:t>shukufuku aruyouni</a:t>
-            </a:r>
-          </a:p>
-        </p:txBody>
-      </p:sp>
-      <p:sp>
-        <p:nvSpPr>
-          <p:cNvPr id="7" name="TextBox 6"/>
-          <p:cNvSpPr txBox="1"/>
-          <p:nvPr/>
-        </p:nvSpPr>
-        <p:spPr>
-          <a:xfrm>
-            <a:off x="594360" y="4672584"/>
-            <a:ext cx="11002975" cy="347472"/>
-          </a:xfrm>
-          <a:prstGeom prst="rect">
-            <a:avLst/>
-          </a:prstGeom>
-          <a:noFill/>
-        </p:spPr>
-        <p:txBody>
-          <a:bodyPr wrap="square">
-            <a:spAutoFit/>
-          </a:bodyPr>
-          <a:lstStyle/>
-          <a:p>
-            <a:pPr algn="ctr"/>
-            <a:r>
-              <a:rPr sz="2000" b="0" i="1">
-                <a:solidFill>
-                  <a:srgbClr val="8C8C8C"/>
-                </a:solidFill>
-                <a:latin typeface="Arial"/>
-              </a:rPr>
-              <a:t/>
             </a:r>
           </a:p>
         </p:txBody>
@@ -4764,23 +4239,23 @@
         </p:nvSpPr>
         <p:spPr>
           <a:xfrm>
-            <a:off x="594360" y="1837944"/>
-            <a:ext cx="11002975" cy="685800"/>
-          </a:xfrm>
-          <a:prstGeom prst="rect">
-            <a:avLst/>
-          </a:prstGeom>
-          <a:noFill/>
-        </p:spPr>
-        <p:txBody>
-          <a:bodyPr wrap="square">
-            <a:spAutoFit/>
-          </a:bodyPr>
-          <a:lstStyle/>
-          <a:p>
-            <a:pPr algn="ctr"/>
-            <a:r>
-              <a:rPr sz="4400" b="1" i="0">
+            <a:off x="640080" y="1650492"/>
+            <a:ext cx="10911535" cy="731520"/>
+          </a:xfrm>
+          <a:prstGeom prst="rect">
+            <a:avLst/>
+          </a:prstGeom>
+          <a:noFill/>
+        </p:spPr>
+        <p:txBody>
+          <a:bodyPr wrap="square">
+            <a:spAutoFit/>
+          </a:bodyPr>
+          <a:lstStyle/>
+          <a:p>
+            <a:pPr algn="ctr"/>
+            <a:r>
+              <a:rPr sz="4800" b="1" i="0">
                 <a:solidFill>
                   <a:srgbClr val="FFFFFF"/>
                 </a:solidFill>
@@ -4799,8 +4274,8 @@
         </p:nvSpPr>
         <p:spPr>
           <a:xfrm>
-            <a:off x="594360" y="2560320"/>
-            <a:ext cx="11002975" cy="384048"/>
+            <a:off x="640080" y="2418588"/>
+            <a:ext cx="10911535" cy="365760"/>
           </a:xfrm>
           <a:prstGeom prst="rect">
             <a:avLst/>
@@ -4817,7 +4292,7 @@
             <a:r>
               <a:rPr sz="2400" b="0" i="1">
                 <a:solidFill>
-                  <a:srgbClr val="B4B4B4"/>
+                  <a:srgbClr val="AAAAAA"/>
                 </a:solidFill>
                 <a:latin typeface="Arial"/>
               </a:rPr>
@@ -4834,29 +4309,29 @@
         </p:nvSpPr>
         <p:spPr>
           <a:xfrm>
-            <a:off x="594360" y="2980944"/>
-            <a:ext cx="11002975" cy="347472"/>
-          </a:xfrm>
-          <a:prstGeom prst="rect">
-            <a:avLst/>
-          </a:prstGeom>
-          <a:noFill/>
-        </p:spPr>
-        <p:txBody>
-          <a:bodyPr wrap="square">
-            <a:spAutoFit/>
-          </a:bodyPr>
-          <a:lstStyle/>
-          <a:p>
-            <a:pPr algn="ctr"/>
-            <a:r>
-              <a:rPr sz="2000" b="0" i="1">
-                <a:solidFill>
-                  <a:srgbClr val="8C8C8C"/>
-                </a:solidFill>
-                <a:latin typeface="Arial"/>
-              </a:rPr>
-              <a:t/>
+            <a:off x="640080" y="2985516"/>
+            <a:ext cx="10911535" cy="731520"/>
+          </a:xfrm>
+          <a:prstGeom prst="rect">
+            <a:avLst/>
+          </a:prstGeom>
+          <a:noFill/>
+        </p:spPr>
+        <p:txBody>
+          <a:bodyPr wrap="square">
+            <a:spAutoFit/>
+          </a:bodyPr>
+          <a:lstStyle/>
+          <a:p>
+            <a:pPr algn="ctr"/>
+            <a:r>
+              <a:rPr sz="4800" b="1" i="0">
+                <a:solidFill>
+                  <a:srgbClr val="FFFFFF"/>
+                </a:solidFill>
+                <a:latin typeface="Arial"/>
+              </a:rPr>
+              <a:t>主の霊に満たされ</a:t>
             </a:r>
           </a:p>
         </p:txBody>
@@ -4869,43 +4344,8 @@
         </p:nvSpPr>
         <p:spPr>
           <a:xfrm>
-            <a:off x="594360" y="3529584"/>
-            <a:ext cx="11002975" cy="685800"/>
-          </a:xfrm>
-          <a:prstGeom prst="rect">
-            <a:avLst/>
-          </a:prstGeom>
-          <a:noFill/>
-        </p:spPr>
-        <p:txBody>
-          <a:bodyPr wrap="square">
-            <a:spAutoFit/>
-          </a:bodyPr>
-          <a:lstStyle/>
-          <a:p>
-            <a:pPr algn="ctr"/>
-            <a:r>
-              <a:rPr sz="4400" b="1" i="0">
-                <a:solidFill>
-                  <a:srgbClr val="FFFFFF"/>
-                </a:solidFill>
-                <a:latin typeface="Arial"/>
-              </a:rPr>
-              <a:t>主の霊に満たされ</a:t>
-            </a:r>
-          </a:p>
-        </p:txBody>
-      </p:sp>
-      <p:sp>
-        <p:nvSpPr>
-          <p:cNvPr id="6" name="TextBox 5"/>
-          <p:cNvSpPr txBox="1"/>
-          <p:nvPr/>
-        </p:nvSpPr>
-        <p:spPr>
-          <a:xfrm>
-            <a:off x="594360" y="4251960"/>
-            <a:ext cx="11002975" cy="384048"/>
+            <a:off x="640080" y="3753612"/>
+            <a:ext cx="10911535" cy="365760"/>
           </a:xfrm>
           <a:prstGeom prst="rect">
             <a:avLst/>
@@ -4922,46 +4362,11 @@
             <a:r>
               <a:rPr sz="2400" b="0" i="1">
                 <a:solidFill>
-                  <a:srgbClr val="B4B4B4"/>
+                  <a:srgbClr val="AAAAAA"/>
                 </a:solidFill>
                 <a:latin typeface="Arial"/>
               </a:rPr>
               <a:t>shu no rei ni mitasare</a:t>
-            </a:r>
-          </a:p>
-        </p:txBody>
-      </p:sp>
-      <p:sp>
-        <p:nvSpPr>
-          <p:cNvPr id="7" name="TextBox 6"/>
-          <p:cNvSpPr txBox="1"/>
-          <p:nvPr/>
-        </p:nvSpPr>
-        <p:spPr>
-          <a:xfrm>
-            <a:off x="594360" y="4672584"/>
-            <a:ext cx="11002975" cy="347472"/>
-          </a:xfrm>
-          <a:prstGeom prst="rect">
-            <a:avLst/>
-          </a:prstGeom>
-          <a:noFill/>
-        </p:spPr>
-        <p:txBody>
-          <a:bodyPr wrap="square">
-            <a:spAutoFit/>
-          </a:bodyPr>
-          <a:lstStyle/>
-          <a:p>
-            <a:pPr algn="ctr"/>
-            <a:r>
-              <a:rPr sz="2000" b="0" i="1">
-                <a:solidFill>
-                  <a:srgbClr val="8C8C8C"/>
-                </a:solidFill>
-                <a:latin typeface="Arial"/>
-              </a:rPr>
-              <a:t/>
             </a:r>
           </a:p>
         </p:txBody>
@@ -5000,23 +4405,23 @@
         </p:nvSpPr>
         <p:spPr>
           <a:xfrm>
-            <a:off x="594360" y="1837944"/>
-            <a:ext cx="11002975" cy="685800"/>
-          </a:xfrm>
-          <a:prstGeom prst="rect">
-            <a:avLst/>
-          </a:prstGeom>
-          <a:noFill/>
-        </p:spPr>
-        <p:txBody>
-          <a:bodyPr wrap="square">
-            <a:spAutoFit/>
-          </a:bodyPr>
-          <a:lstStyle/>
-          <a:p>
-            <a:pPr algn="ctr"/>
-            <a:r>
-              <a:rPr sz="4400" b="1" i="0">
+            <a:off x="640080" y="1650492"/>
+            <a:ext cx="10911535" cy="731520"/>
+          </a:xfrm>
+          <a:prstGeom prst="rect">
+            <a:avLst/>
+          </a:prstGeom>
+          <a:noFill/>
+        </p:spPr>
+        <p:txBody>
+          <a:bodyPr wrap="square">
+            <a:spAutoFit/>
+          </a:bodyPr>
+          <a:lstStyle/>
+          <a:p>
+            <a:pPr algn="ctr"/>
+            <a:r>
+              <a:rPr sz="4800" b="1" i="0">
                 <a:solidFill>
                   <a:srgbClr val="FFFFFF"/>
                 </a:solidFill>
@@ -5035,8 +4440,8 @@
         </p:nvSpPr>
         <p:spPr>
           <a:xfrm>
-            <a:off x="594360" y="2560320"/>
-            <a:ext cx="11002975" cy="384048"/>
+            <a:off x="640080" y="2418588"/>
+            <a:ext cx="10911535" cy="365760"/>
           </a:xfrm>
           <a:prstGeom prst="rect">
             <a:avLst/>
@@ -5053,7 +4458,7 @@
             <a:r>
               <a:rPr sz="2400" b="0" i="1">
                 <a:solidFill>
-                  <a:srgbClr val="B4B4B4"/>
+                  <a:srgbClr val="AAAAAA"/>
                 </a:solidFill>
                 <a:latin typeface="Arial"/>
               </a:rPr>
@@ -5070,29 +4475,29 @@
         </p:nvSpPr>
         <p:spPr>
           <a:xfrm>
-            <a:off x="594360" y="2980944"/>
-            <a:ext cx="11002975" cy="347472"/>
-          </a:xfrm>
-          <a:prstGeom prst="rect">
-            <a:avLst/>
-          </a:prstGeom>
-          <a:noFill/>
-        </p:spPr>
-        <p:txBody>
-          <a:bodyPr wrap="square">
-            <a:spAutoFit/>
-          </a:bodyPr>
-          <a:lstStyle/>
-          <a:p>
-            <a:pPr algn="ctr"/>
-            <a:r>
-              <a:rPr sz="2000" b="0" i="1">
-                <a:solidFill>
-                  <a:srgbClr val="8C8C8C"/>
-                </a:solidFill>
-                <a:latin typeface="Arial"/>
-              </a:rPr>
-              <a:t/>
+            <a:off x="640080" y="2985516"/>
+            <a:ext cx="10911535" cy="731520"/>
+          </a:xfrm>
+          <a:prstGeom prst="rect">
+            <a:avLst/>
+          </a:prstGeom>
+          <a:noFill/>
+        </p:spPr>
+        <p:txBody>
+          <a:bodyPr wrap="square">
+            <a:spAutoFit/>
+          </a:bodyPr>
+          <a:lstStyle/>
+          <a:p>
+            <a:pPr algn="ctr"/>
+            <a:r>
+              <a:rPr sz="4800" b="1" i="0">
+                <a:solidFill>
+                  <a:srgbClr val="FFFFFF"/>
+                </a:solidFill>
+                <a:latin typeface="Arial"/>
+              </a:rPr>
+              <a:t>主がおられるように</a:t>
             </a:r>
           </a:p>
         </p:txBody>
@@ -5105,43 +4510,8 @@
         </p:nvSpPr>
         <p:spPr>
           <a:xfrm>
-            <a:off x="594360" y="3529584"/>
-            <a:ext cx="11002975" cy="685800"/>
-          </a:xfrm>
-          <a:prstGeom prst="rect">
-            <a:avLst/>
-          </a:prstGeom>
-          <a:noFill/>
-        </p:spPr>
-        <p:txBody>
-          <a:bodyPr wrap="square">
-            <a:spAutoFit/>
-          </a:bodyPr>
-          <a:lstStyle/>
-          <a:p>
-            <a:pPr algn="ctr"/>
-            <a:r>
-              <a:rPr sz="4400" b="1" i="0">
-                <a:solidFill>
-                  <a:srgbClr val="FFFFFF"/>
-                </a:solidFill>
-                <a:latin typeface="Arial"/>
-              </a:rPr>
-              <a:t>主がおられるように</a:t>
-            </a:r>
-          </a:p>
-        </p:txBody>
-      </p:sp>
-      <p:sp>
-        <p:nvSpPr>
-          <p:cNvPr id="6" name="TextBox 5"/>
-          <p:cNvSpPr txBox="1"/>
-          <p:nvPr/>
-        </p:nvSpPr>
-        <p:spPr>
-          <a:xfrm>
-            <a:off x="594360" y="4251960"/>
-            <a:ext cx="11002975" cy="384048"/>
+            <a:off x="640080" y="3753612"/>
+            <a:ext cx="10911535" cy="365760"/>
           </a:xfrm>
           <a:prstGeom prst="rect">
             <a:avLst/>
@@ -5158,46 +4528,11 @@
             <a:r>
               <a:rPr sz="2400" b="0" i="1">
                 <a:solidFill>
-                  <a:srgbClr val="B4B4B4"/>
+                  <a:srgbClr val="AAAAAA"/>
                 </a:solidFill>
                 <a:latin typeface="Arial"/>
               </a:rPr>
               <a:t>shu ga orareru youni</a:t>
-            </a:r>
-          </a:p>
-        </p:txBody>
-      </p:sp>
-      <p:sp>
-        <p:nvSpPr>
-          <p:cNvPr id="7" name="TextBox 6"/>
-          <p:cNvSpPr txBox="1"/>
-          <p:nvPr/>
-        </p:nvSpPr>
-        <p:spPr>
-          <a:xfrm>
-            <a:off x="594360" y="4672584"/>
-            <a:ext cx="11002975" cy="347472"/>
-          </a:xfrm>
-          <a:prstGeom prst="rect">
-            <a:avLst/>
-          </a:prstGeom>
-          <a:noFill/>
-        </p:spPr>
-        <p:txBody>
-          <a:bodyPr wrap="square">
-            <a:spAutoFit/>
-          </a:bodyPr>
-          <a:lstStyle/>
-          <a:p>
-            <a:pPr algn="ctr"/>
-            <a:r>
-              <a:rPr sz="2000" b="0" i="1">
-                <a:solidFill>
-                  <a:srgbClr val="8C8C8C"/>
-                </a:solidFill>
-                <a:latin typeface="Arial"/>
-              </a:rPr>
-              <a:t/>
             </a:r>
           </a:p>
         </p:txBody>
@@ -5236,23 +4571,23 @@
         </p:nvSpPr>
         <p:spPr>
           <a:xfrm>
-            <a:off x="594360" y="2683764"/>
-            <a:ext cx="11002975" cy="685800"/>
-          </a:xfrm>
-          <a:prstGeom prst="rect">
-            <a:avLst/>
-          </a:prstGeom>
-          <a:noFill/>
-        </p:spPr>
-        <p:txBody>
-          <a:bodyPr wrap="square">
-            <a:spAutoFit/>
-          </a:bodyPr>
-          <a:lstStyle/>
-          <a:p>
-            <a:pPr algn="ctr"/>
-            <a:r>
-              <a:rPr sz="4400" b="1" i="0">
+            <a:off x="640080" y="2500884"/>
+            <a:ext cx="10911535" cy="731520"/>
+          </a:xfrm>
+          <a:prstGeom prst="rect">
+            <a:avLst/>
+          </a:prstGeom>
+          <a:noFill/>
+        </p:spPr>
+        <p:txBody>
+          <a:bodyPr wrap="square">
+            <a:spAutoFit/>
+          </a:bodyPr>
+          <a:lstStyle/>
+          <a:p>
+            <a:pPr algn="ctr"/>
+            <a:r>
+              <a:rPr sz="4800" b="1" i="0">
                 <a:solidFill>
                   <a:srgbClr val="FFFFFF"/>
                 </a:solidFill>
@@ -5271,8 +4606,8 @@
         </p:nvSpPr>
         <p:spPr>
           <a:xfrm>
-            <a:off x="594360" y="3406140"/>
-            <a:ext cx="11002975" cy="384048"/>
+            <a:off x="640080" y="3268980"/>
+            <a:ext cx="10911535" cy="365760"/>
           </a:xfrm>
           <a:prstGeom prst="rect">
             <a:avLst/>
@@ -5289,7 +4624,7 @@
             <a:r>
               <a:rPr sz="2400" b="0" i="1">
                 <a:solidFill>
-                  <a:srgbClr val="B4B4B4"/>
+                  <a:srgbClr val="AAAAAA"/>
                 </a:solidFill>
                 <a:latin typeface="Arial"/>
               </a:rPr>
@@ -5306,8 +4641,8 @@
         </p:nvSpPr>
         <p:spPr>
           <a:xfrm>
-            <a:off x="594360" y="3826764"/>
-            <a:ext cx="11002975" cy="347472"/>
+            <a:off x="640080" y="4046220"/>
+            <a:ext cx="10911535" cy="310896"/>
           </a:xfrm>
           <a:prstGeom prst="rect">
             <a:avLst/>
@@ -5324,11 +4659,11 @@
             <a:r>
               <a:rPr sz="2000" b="0" i="1">
                 <a:solidFill>
-                  <a:srgbClr val="8C8C8C"/>
-                </a:solidFill>
-                <a:latin typeface="Arial"/>
-              </a:rPr>
-              <a:t/>
+                  <a:srgbClr val="828282"/>
+                </a:solidFill>
+                <a:latin typeface="Arial"/>
+              </a:rPr>
+              <a:t>E os filhos de teus filhos</a:t>
             </a:r>
           </a:p>
         </p:txBody>
@@ -5367,23 +4702,23 @@
         </p:nvSpPr>
         <p:spPr>
           <a:xfrm>
-            <a:off x="594360" y="1837944"/>
-            <a:ext cx="11002975" cy="685800"/>
-          </a:xfrm>
-          <a:prstGeom prst="rect">
-            <a:avLst/>
-          </a:prstGeom>
-          <a:noFill/>
-        </p:spPr>
-        <p:txBody>
-          <a:bodyPr wrap="square">
-            <a:spAutoFit/>
-          </a:bodyPr>
-          <a:lstStyle/>
-          <a:p>
-            <a:pPr algn="ctr"/>
-            <a:r>
-              <a:rPr sz="4400" b="1" i="0">
+            <a:off x="640080" y="1650492"/>
+            <a:ext cx="10911535" cy="731520"/>
+          </a:xfrm>
+          <a:prstGeom prst="rect">
+            <a:avLst/>
+          </a:prstGeom>
+          <a:noFill/>
+        </p:spPr>
+        <p:txBody>
+          <a:bodyPr wrap="square">
+            <a:spAutoFit/>
+          </a:bodyPr>
+          <a:lstStyle/>
+          <a:p>
+            <a:pPr algn="ctr"/>
+            <a:r>
+              <a:rPr sz="4800" b="1" i="0">
                 <a:solidFill>
                   <a:srgbClr val="FFFFFF"/>
                 </a:solidFill>
@@ -5402,8 +4737,8 @@
         </p:nvSpPr>
         <p:spPr>
           <a:xfrm>
-            <a:off x="594360" y="2560320"/>
-            <a:ext cx="11002975" cy="384048"/>
+            <a:off x="640080" y="2418588"/>
+            <a:ext cx="10911535" cy="365760"/>
           </a:xfrm>
           <a:prstGeom prst="rect">
             <a:avLst/>
@@ -5420,7 +4755,7 @@
             <a:r>
               <a:rPr sz="2400" b="0" i="1">
                 <a:solidFill>
-                  <a:srgbClr val="B4B4B4"/>
+                  <a:srgbClr val="AAAAAA"/>
                 </a:solidFill>
                 <a:latin typeface="Arial"/>
               </a:rPr>
@@ -5437,29 +4772,29 @@
         </p:nvSpPr>
         <p:spPr>
           <a:xfrm>
-            <a:off x="594360" y="2980944"/>
-            <a:ext cx="11002975" cy="347472"/>
-          </a:xfrm>
-          <a:prstGeom prst="rect">
-            <a:avLst/>
-          </a:prstGeom>
-          <a:noFill/>
-        </p:spPr>
-        <p:txBody>
-          <a:bodyPr wrap="square">
-            <a:spAutoFit/>
-          </a:bodyPr>
-          <a:lstStyle/>
-          <a:p>
-            <a:pPr algn="ctr"/>
-            <a:r>
-              <a:rPr sz="2000" b="0" i="1">
-                <a:solidFill>
-                  <a:srgbClr val="8C8C8C"/>
-                </a:solidFill>
-                <a:latin typeface="Arial"/>
-              </a:rPr>
-              <a:t/>
+            <a:off x="640080" y="2985516"/>
+            <a:ext cx="10911535" cy="731520"/>
+          </a:xfrm>
+          <a:prstGeom prst="rect">
+            <a:avLst/>
+          </a:prstGeom>
+          <a:noFill/>
+        </p:spPr>
+        <p:txBody>
+          <a:bodyPr wrap="square">
+            <a:spAutoFit/>
+          </a:bodyPr>
+          <a:lstStyle/>
+          <a:p>
+            <a:pPr algn="ctr"/>
+            <a:r>
+              <a:rPr sz="4800" b="1" i="0">
+                <a:solidFill>
+                  <a:srgbClr val="FFFFFF"/>
+                </a:solidFill>
+                <a:latin typeface="Arial"/>
+              </a:rPr>
+              <a:t>喜びのときも</a:t>
             </a:r>
           </a:p>
         </p:txBody>
@@ -5472,43 +4807,8 @@
         </p:nvSpPr>
         <p:spPr>
           <a:xfrm>
-            <a:off x="594360" y="3529584"/>
-            <a:ext cx="11002975" cy="685800"/>
-          </a:xfrm>
-          <a:prstGeom prst="rect">
-            <a:avLst/>
-          </a:prstGeom>
-          <a:noFill/>
-        </p:spPr>
-        <p:txBody>
-          <a:bodyPr wrap="square">
-            <a:spAutoFit/>
-          </a:bodyPr>
-          <a:lstStyle/>
-          <a:p>
-            <a:pPr algn="ctr"/>
-            <a:r>
-              <a:rPr sz="4400" b="1" i="0">
-                <a:solidFill>
-                  <a:srgbClr val="FFFFFF"/>
-                </a:solidFill>
-                <a:latin typeface="Arial"/>
-              </a:rPr>
-              <a:t>喜びのときも</a:t>
-            </a:r>
-          </a:p>
-        </p:txBody>
-      </p:sp>
-      <p:sp>
-        <p:nvSpPr>
-          <p:cNvPr id="6" name="TextBox 5"/>
-          <p:cNvSpPr txBox="1"/>
-          <p:nvPr/>
-        </p:nvSpPr>
-        <p:spPr>
-          <a:xfrm>
-            <a:off x="594360" y="4251960"/>
-            <a:ext cx="11002975" cy="384048"/>
+            <a:off x="640080" y="3753612"/>
+            <a:ext cx="10911535" cy="365760"/>
           </a:xfrm>
           <a:prstGeom prst="rect">
             <a:avLst/>
@@ -5525,46 +4825,11 @@
             <a:r>
               <a:rPr sz="2400" b="0" i="1">
                 <a:solidFill>
-                  <a:srgbClr val="B4B4B4"/>
+                  <a:srgbClr val="AAAAAA"/>
                 </a:solidFill>
                 <a:latin typeface="Arial"/>
               </a:rPr>
               <a:t>yorokobi no tokimo</a:t>
-            </a:r>
-          </a:p>
-        </p:txBody>
-      </p:sp>
-      <p:sp>
-        <p:nvSpPr>
-          <p:cNvPr id="7" name="TextBox 6"/>
-          <p:cNvSpPr txBox="1"/>
-          <p:nvPr/>
-        </p:nvSpPr>
-        <p:spPr>
-          <a:xfrm>
-            <a:off x="594360" y="4672584"/>
-            <a:ext cx="11002975" cy="347472"/>
-          </a:xfrm>
-          <a:prstGeom prst="rect">
-            <a:avLst/>
-          </a:prstGeom>
-          <a:noFill/>
-        </p:spPr>
-        <p:txBody>
-          <a:bodyPr wrap="square">
-            <a:spAutoFit/>
-          </a:bodyPr>
-          <a:lstStyle/>
-          <a:p>
-            <a:pPr algn="ctr"/>
-            <a:r>
-              <a:rPr sz="2000" b="0" i="1">
-                <a:solidFill>
-                  <a:srgbClr val="8C8C8C"/>
-                </a:solidFill>
-                <a:latin typeface="Arial"/>
-              </a:rPr>
-              <a:t/>
             </a:r>
           </a:p>
         </p:txBody>
@@ -5603,23 +4868,23 @@
         </p:nvSpPr>
         <p:spPr>
           <a:xfrm>
-            <a:off x="594360" y="1837944"/>
-            <a:ext cx="11002975" cy="685800"/>
-          </a:xfrm>
-          <a:prstGeom prst="rect">
-            <a:avLst/>
-          </a:prstGeom>
-          <a:noFill/>
-        </p:spPr>
-        <p:txBody>
-          <a:bodyPr wrap="square">
-            <a:spAutoFit/>
-          </a:bodyPr>
-          <a:lstStyle/>
-          <a:p>
-            <a:pPr algn="ctr"/>
-            <a:r>
-              <a:rPr sz="4400" b="1" i="0">
+            <a:off x="640080" y="1650492"/>
+            <a:ext cx="10911535" cy="731520"/>
+          </a:xfrm>
+          <a:prstGeom prst="rect">
+            <a:avLst/>
+          </a:prstGeom>
+          <a:noFill/>
+        </p:spPr>
+        <p:txBody>
+          <a:bodyPr wrap="square">
+            <a:spAutoFit/>
+          </a:bodyPr>
+          <a:lstStyle/>
+          <a:p>
+            <a:pPr algn="ctr"/>
+            <a:r>
+              <a:rPr sz="4800" b="1" i="0">
                 <a:solidFill>
                   <a:srgbClr val="FFFFFF"/>
                 </a:solidFill>
@@ -5638,8 +4903,8 @@
         </p:nvSpPr>
         <p:spPr>
           <a:xfrm>
-            <a:off x="594360" y="2560320"/>
-            <a:ext cx="11002975" cy="384048"/>
+            <a:off x="640080" y="2418588"/>
+            <a:ext cx="10911535" cy="365760"/>
           </a:xfrm>
           <a:prstGeom prst="rect">
             <a:avLst/>
@@ -5656,7 +4921,7 @@
             <a:r>
               <a:rPr sz="2400" b="0" i="1">
                 <a:solidFill>
-                  <a:srgbClr val="B4B4B4"/>
+                  <a:srgbClr val="AAAAAA"/>
                 </a:solidFill>
                 <a:latin typeface="Arial"/>
               </a:rPr>
@@ -5673,29 +4938,29 @@
         </p:nvSpPr>
         <p:spPr>
           <a:xfrm>
-            <a:off x="594360" y="2980944"/>
-            <a:ext cx="11002975" cy="347472"/>
-          </a:xfrm>
-          <a:prstGeom prst="rect">
-            <a:avLst/>
-          </a:prstGeom>
-          <a:noFill/>
-        </p:spPr>
-        <p:txBody>
-          <a:bodyPr wrap="square">
-            <a:spAutoFit/>
-          </a:bodyPr>
-          <a:lstStyle/>
-          <a:p>
-            <a:pPr algn="ctr"/>
-            <a:r>
-              <a:rPr sz="2000" b="0" i="1">
-                <a:solidFill>
-                  <a:srgbClr val="8C8C8C"/>
-                </a:solidFill>
-                <a:latin typeface="Arial"/>
-              </a:rPr>
-              <a:t/>
+            <a:off x="640080" y="2985516"/>
+            <a:ext cx="10911535" cy="731520"/>
+          </a:xfrm>
+          <a:prstGeom prst="rect">
+            <a:avLst/>
+          </a:prstGeom>
+          <a:noFill/>
+        </p:spPr>
+        <p:txBody>
+          <a:bodyPr wrap="square">
+            <a:spAutoFit/>
+          </a:bodyPr>
+          <a:lstStyle/>
+          <a:p>
+            <a:pPr algn="ctr"/>
+            <a:r>
+              <a:rPr sz="4800" b="1" i="0">
+                <a:solidFill>
+                  <a:srgbClr val="FFFFFF"/>
+                </a:solidFill>
+                <a:latin typeface="Arial"/>
+              </a:rPr>
+              <a:t>主はとこしえまで</a:t>
             </a:r>
           </a:p>
         </p:txBody>
@@ -5708,43 +4973,8 @@
         </p:nvSpPr>
         <p:spPr>
           <a:xfrm>
-            <a:off x="594360" y="3529584"/>
-            <a:ext cx="11002975" cy="685800"/>
-          </a:xfrm>
-          <a:prstGeom prst="rect">
-            <a:avLst/>
-          </a:prstGeom>
-          <a:noFill/>
-        </p:spPr>
-        <p:txBody>
-          <a:bodyPr wrap="square">
-            <a:spAutoFit/>
-          </a:bodyPr>
-          <a:lstStyle/>
-          <a:p>
-            <a:pPr algn="ctr"/>
-            <a:r>
-              <a:rPr sz="4400" b="1" i="0">
-                <a:solidFill>
-                  <a:srgbClr val="FFFFFF"/>
-                </a:solidFill>
-                <a:latin typeface="Arial"/>
-              </a:rPr>
-              <a:t>主はとこしえまで</a:t>
-            </a:r>
-          </a:p>
-        </p:txBody>
-      </p:sp>
-      <p:sp>
-        <p:nvSpPr>
-          <p:cNvPr id="6" name="TextBox 5"/>
-          <p:cNvSpPr txBox="1"/>
-          <p:nvPr/>
-        </p:nvSpPr>
-        <p:spPr>
-          <a:xfrm>
-            <a:off x="594360" y="4251960"/>
-            <a:ext cx="11002975" cy="384048"/>
+            <a:off x="640080" y="3753612"/>
+            <a:ext cx="10911535" cy="365760"/>
           </a:xfrm>
           <a:prstGeom prst="rect">
             <a:avLst/>
@@ -5761,46 +4991,11 @@
             <a:r>
               <a:rPr sz="2400" b="0" i="1">
                 <a:solidFill>
-                  <a:srgbClr val="B4B4B4"/>
+                  <a:srgbClr val="AAAAAA"/>
                 </a:solidFill>
                 <a:latin typeface="Arial"/>
               </a:rPr>
               <a:t>shu wa tokoshiemade</a:t>
-            </a:r>
-          </a:p>
-        </p:txBody>
-      </p:sp>
-      <p:sp>
-        <p:nvSpPr>
-          <p:cNvPr id="7" name="TextBox 6"/>
-          <p:cNvSpPr txBox="1"/>
-          <p:nvPr/>
-        </p:nvSpPr>
-        <p:spPr>
-          <a:xfrm>
-            <a:off x="594360" y="4672584"/>
-            <a:ext cx="11002975" cy="347472"/>
-          </a:xfrm>
-          <a:prstGeom prst="rect">
-            <a:avLst/>
-          </a:prstGeom>
-          <a:noFill/>
-        </p:spPr>
-        <p:txBody>
-          <a:bodyPr wrap="square">
-            <a:spAutoFit/>
-          </a:bodyPr>
-          <a:lstStyle/>
-          <a:p>
-            <a:pPr algn="ctr"/>
-            <a:r>
-              <a:rPr sz="2000" b="0" i="1">
-                <a:solidFill>
-                  <a:srgbClr val="8C8C8C"/>
-                </a:solidFill>
-                <a:latin typeface="Arial"/>
-              </a:rPr>
-              <a:t/>
             </a:r>
           </a:p>
         </p:txBody>
@@ -5839,23 +5034,23 @@
         </p:nvSpPr>
         <p:spPr>
           <a:xfrm>
-            <a:off x="594360" y="1837944"/>
-            <a:ext cx="11002975" cy="685800"/>
-          </a:xfrm>
-          <a:prstGeom prst="rect">
-            <a:avLst/>
-          </a:prstGeom>
-          <a:noFill/>
-        </p:spPr>
-        <p:txBody>
-          <a:bodyPr wrap="square">
-            <a:spAutoFit/>
-          </a:bodyPr>
-          <a:lstStyle/>
-          <a:p>
-            <a:pPr algn="ctr"/>
-            <a:r>
-              <a:rPr sz="4400" b="1" i="0">
+            <a:off x="640080" y="1650492"/>
+            <a:ext cx="10911535" cy="731520"/>
+          </a:xfrm>
+          <a:prstGeom prst="rect">
+            <a:avLst/>
+          </a:prstGeom>
+          <a:noFill/>
+        </p:spPr>
+        <p:txBody>
+          <a:bodyPr wrap="square">
+            <a:spAutoFit/>
+          </a:bodyPr>
+          <a:lstStyle/>
+          <a:p>
+            <a:pPr algn="ctr"/>
+            <a:r>
+              <a:rPr sz="4800" b="1" i="0">
                 <a:solidFill>
                   <a:srgbClr val="FFFFFF"/>
                 </a:solidFill>
@@ -5874,8 +5069,8 @@
         </p:nvSpPr>
         <p:spPr>
           <a:xfrm>
-            <a:off x="594360" y="2560320"/>
-            <a:ext cx="11002975" cy="384048"/>
+            <a:off x="640080" y="2418588"/>
+            <a:ext cx="10911535" cy="365760"/>
           </a:xfrm>
           <a:prstGeom prst="rect">
             <a:avLst/>
@@ -5892,7 +5087,7 @@
             <a:r>
               <a:rPr sz="2400" b="0" i="1">
                 <a:solidFill>
-                  <a:srgbClr val="B4B4B4"/>
+                  <a:srgbClr val="AAAAAA"/>
                 </a:solidFill>
                 <a:latin typeface="Arial"/>
               </a:rPr>
@@ -5909,29 +5104,29 @@
         </p:nvSpPr>
         <p:spPr>
           <a:xfrm>
-            <a:off x="594360" y="2980944"/>
-            <a:ext cx="11002975" cy="347472"/>
-          </a:xfrm>
-          <a:prstGeom prst="rect">
-            <a:avLst/>
-          </a:prstGeom>
-          <a:noFill/>
-        </p:spPr>
-        <p:txBody>
-          <a:bodyPr wrap="square">
-            <a:spAutoFit/>
-          </a:bodyPr>
-          <a:lstStyle/>
-          <a:p>
-            <a:pPr algn="ctr"/>
-            <a:r>
-              <a:rPr sz="2000" b="0" i="1">
-                <a:solidFill>
-                  <a:srgbClr val="8C8C8C"/>
-                </a:solidFill>
-                <a:latin typeface="Arial"/>
-              </a:rPr>
-              <a:t/>
+            <a:off x="640080" y="2985516"/>
+            <a:ext cx="10911535" cy="731520"/>
+          </a:xfrm>
+          <a:prstGeom prst="rect">
+            <a:avLst/>
+          </a:prstGeom>
+          <a:noFill/>
+        </p:spPr>
+        <p:txBody>
+          <a:bodyPr wrap="square">
+            <a:spAutoFit/>
+          </a:bodyPr>
+          <a:lstStyle/>
+          <a:p>
+            <a:pPr algn="ctr"/>
+            <a:r>
+              <a:rPr sz="4800" b="1" i="0">
+                <a:solidFill>
+                  <a:srgbClr val="FFFFFF"/>
+                </a:solidFill>
+                <a:latin typeface="Arial"/>
+              </a:rPr>
+              <a:t>あなたの味方</a:t>
             </a:r>
           </a:p>
         </p:txBody>
@@ -5944,43 +5139,8 @@
         </p:nvSpPr>
         <p:spPr>
           <a:xfrm>
-            <a:off x="594360" y="3529584"/>
-            <a:ext cx="11002975" cy="685800"/>
-          </a:xfrm>
-          <a:prstGeom prst="rect">
-            <a:avLst/>
-          </a:prstGeom>
-          <a:noFill/>
-        </p:spPr>
-        <p:txBody>
-          <a:bodyPr wrap="square">
-            <a:spAutoFit/>
-          </a:bodyPr>
-          <a:lstStyle/>
-          <a:p>
-            <a:pPr algn="ctr"/>
-            <a:r>
-              <a:rPr sz="4400" b="1" i="0">
-                <a:solidFill>
-                  <a:srgbClr val="FFFFFF"/>
-                </a:solidFill>
-                <a:latin typeface="Arial"/>
-              </a:rPr>
-              <a:t>あなたの味方</a:t>
-            </a:r>
-          </a:p>
-        </p:txBody>
-      </p:sp>
-      <p:sp>
-        <p:nvSpPr>
-          <p:cNvPr id="6" name="TextBox 5"/>
-          <p:cNvSpPr txBox="1"/>
-          <p:nvPr/>
-        </p:nvSpPr>
-        <p:spPr>
-          <a:xfrm>
-            <a:off x="594360" y="4251960"/>
-            <a:ext cx="11002975" cy="384048"/>
+            <a:off x="640080" y="3753612"/>
+            <a:ext cx="10911535" cy="365760"/>
           </a:xfrm>
           <a:prstGeom prst="rect">
             <a:avLst/>
@@ -5997,46 +5157,11 @@
             <a:r>
               <a:rPr sz="2400" b="0" i="1">
                 <a:solidFill>
-                  <a:srgbClr val="B4B4B4"/>
+                  <a:srgbClr val="AAAAAA"/>
                 </a:solidFill>
                 <a:latin typeface="Arial"/>
               </a:rPr>
               <a:t>anata no mikata</a:t>
-            </a:r>
-          </a:p>
-        </p:txBody>
-      </p:sp>
-      <p:sp>
-        <p:nvSpPr>
-          <p:cNvPr id="7" name="TextBox 6"/>
-          <p:cNvSpPr txBox="1"/>
-          <p:nvPr/>
-        </p:nvSpPr>
-        <p:spPr>
-          <a:xfrm>
-            <a:off x="594360" y="4672584"/>
-            <a:ext cx="11002975" cy="347472"/>
-          </a:xfrm>
-          <a:prstGeom prst="rect">
-            <a:avLst/>
-          </a:prstGeom>
-          <a:noFill/>
-        </p:spPr>
-        <p:txBody>
-          <a:bodyPr wrap="square">
-            <a:spAutoFit/>
-          </a:bodyPr>
-          <a:lstStyle/>
-          <a:p>
-            <a:pPr algn="ctr"/>
-            <a:r>
-              <a:rPr sz="2000" b="0" i="1">
-                <a:solidFill>
-                  <a:srgbClr val="8C8C8C"/>
-                </a:solidFill>
-                <a:latin typeface="Arial"/>
-              </a:rPr>
-              <a:t/>
             </a:r>
           </a:p>
         </p:txBody>
@@ -6075,23 +5200,23 @@
         </p:nvSpPr>
         <p:spPr>
           <a:xfrm>
-            <a:off x="594360" y="2683764"/>
-            <a:ext cx="11002975" cy="685800"/>
-          </a:xfrm>
-          <a:prstGeom prst="rect">
-            <a:avLst/>
-          </a:prstGeom>
-          <a:noFill/>
-        </p:spPr>
-        <p:txBody>
-          <a:bodyPr wrap="square">
-            <a:spAutoFit/>
-          </a:bodyPr>
-          <a:lstStyle/>
-          <a:p>
-            <a:pPr algn="ctr"/>
-            <a:r>
-              <a:rPr sz="4400" b="1" i="0">
+            <a:off x="640080" y="2500884"/>
+            <a:ext cx="10911535" cy="731520"/>
+          </a:xfrm>
+          <a:prstGeom prst="rect">
+            <a:avLst/>
+          </a:prstGeom>
+          <a:noFill/>
+        </p:spPr>
+        <p:txBody>
+          <a:bodyPr wrap="square">
+            <a:spAutoFit/>
+          </a:bodyPr>
+          <a:lstStyle/>
+          <a:p>
+            <a:pPr algn="ctr"/>
+            <a:r>
+              <a:rPr sz="4800" b="1" i="0">
                 <a:solidFill>
                   <a:srgbClr val="FFFFFF"/>
                 </a:solidFill>
@@ -6110,8 +5235,8 @@
         </p:nvSpPr>
         <p:spPr>
           <a:xfrm>
-            <a:off x="594360" y="3406140"/>
-            <a:ext cx="11002975" cy="384048"/>
+            <a:off x="640080" y="3268980"/>
+            <a:ext cx="10911535" cy="365760"/>
           </a:xfrm>
           <a:prstGeom prst="rect">
             <a:avLst/>
@@ -6128,46 +5253,11 @@
             <a:r>
               <a:rPr sz="2400" b="0" i="1">
                 <a:solidFill>
-                  <a:srgbClr val="B4B4B4"/>
+                  <a:srgbClr val="AAAAAA"/>
                 </a:solidFill>
                 <a:latin typeface="Arial"/>
               </a:rPr>
               <a:t>anata no mikata</a:t>
-            </a:r>
-          </a:p>
-        </p:txBody>
-      </p:sp>
-      <p:sp>
-        <p:nvSpPr>
-          <p:cNvPr id="4" name="TextBox 3"/>
-          <p:cNvSpPr txBox="1"/>
-          <p:nvPr/>
-        </p:nvSpPr>
-        <p:spPr>
-          <a:xfrm>
-            <a:off x="594360" y="3826764"/>
-            <a:ext cx="11002975" cy="347472"/>
-          </a:xfrm>
-          <a:prstGeom prst="rect">
-            <a:avLst/>
-          </a:prstGeom>
-          <a:noFill/>
-        </p:spPr>
-        <p:txBody>
-          <a:bodyPr wrap="square">
-            <a:spAutoFit/>
-          </a:bodyPr>
-          <a:lstStyle/>
-          <a:p>
-            <a:pPr algn="ctr"/>
-            <a:r>
-              <a:rPr sz="2000" b="0" i="1">
-                <a:solidFill>
-                  <a:srgbClr val="8C8C8C"/>
-                </a:solidFill>
-                <a:latin typeface="Arial"/>
-              </a:rPr>
-              <a:t/>
             </a:r>
           </a:p>
         </p:txBody>
@@ -6206,23 +5296,23 @@
         </p:nvSpPr>
         <p:spPr>
           <a:xfrm>
-            <a:off x="594360" y="2258568"/>
-            <a:ext cx="11002975" cy="685800"/>
-          </a:xfrm>
-          <a:prstGeom prst="rect">
-            <a:avLst/>
-          </a:prstGeom>
-          <a:noFill/>
-        </p:spPr>
-        <p:txBody>
-          <a:bodyPr wrap="square">
-            <a:spAutoFit/>
-          </a:bodyPr>
-          <a:lstStyle/>
-          <a:p>
-            <a:pPr algn="ctr"/>
-            <a:r>
-              <a:rPr sz="4400" b="1" i="0">
+            <a:off x="640080" y="2052828"/>
+            <a:ext cx="10911535" cy="731520"/>
+          </a:xfrm>
+          <a:prstGeom prst="rect">
+            <a:avLst/>
+          </a:prstGeom>
+          <a:noFill/>
+        </p:spPr>
+        <p:txBody>
+          <a:bodyPr wrap="square">
+            <a:spAutoFit/>
+          </a:bodyPr>
+          <a:lstStyle/>
+          <a:p>
+            <a:pPr algn="ctr"/>
+            <a:r>
+              <a:rPr sz="4800" b="1" i="0">
                 <a:solidFill>
                   <a:srgbClr val="FFFFFF"/>
                 </a:solidFill>
@@ -6241,99 +5331,29 @@
         </p:nvSpPr>
         <p:spPr>
           <a:xfrm>
-            <a:off x="594360" y="2980944"/>
-            <a:ext cx="11002975" cy="347472"/>
-          </a:xfrm>
-          <a:prstGeom prst="rect">
-            <a:avLst/>
-          </a:prstGeom>
-          <a:noFill/>
-        </p:spPr>
-        <p:txBody>
-          <a:bodyPr wrap="square">
-            <a:spAutoFit/>
-          </a:bodyPr>
-          <a:lstStyle/>
-          <a:p>
-            <a:pPr algn="ctr"/>
-            <a:r>
-              <a:rPr sz="2200" b="0" i="1">
-                <a:solidFill>
-                  <a:srgbClr val="8C8C8C"/>
-                </a:solidFill>
-                <a:latin typeface="Arial"/>
-              </a:rPr>
-              <a:t/>
-            </a:r>
-          </a:p>
-        </p:txBody>
-      </p:sp>
-      <p:sp>
-        <p:nvSpPr>
-          <p:cNvPr id="4" name="TextBox 3"/>
-          <p:cNvSpPr txBox="1"/>
-          <p:nvPr/>
-        </p:nvSpPr>
-        <p:spPr>
-          <a:xfrm>
-            <a:off x="594360" y="3529584"/>
-            <a:ext cx="11002975" cy="685800"/>
-          </a:xfrm>
-          <a:prstGeom prst="rect">
-            <a:avLst/>
-          </a:prstGeom>
-          <a:noFill/>
-        </p:spPr>
-        <p:txBody>
-          <a:bodyPr wrap="square">
-            <a:spAutoFit/>
-          </a:bodyPr>
-          <a:lstStyle/>
-          <a:p>
-            <a:pPr algn="ctr"/>
-            <a:r>
-              <a:rPr sz="4400" b="1" i="0">
+            <a:off x="640080" y="2985516"/>
+            <a:ext cx="10911535" cy="731520"/>
+          </a:xfrm>
+          <a:prstGeom prst="rect">
+            <a:avLst/>
+          </a:prstGeom>
+          <a:noFill/>
+        </p:spPr>
+        <p:txBody>
+          <a:bodyPr wrap="square">
+            <a:spAutoFit/>
+          </a:bodyPr>
+          <a:lstStyle/>
+          <a:p>
+            <a:pPr algn="ctr"/>
+            <a:r>
+              <a:rPr sz="4800" b="1" i="0">
                 <a:solidFill>
                   <a:srgbClr val="FFFFFF"/>
                 </a:solidFill>
                 <a:latin typeface="Arial"/>
               </a:rPr>
               <a:t>E faça brilhar Seu rosto em ti</a:t>
-            </a:r>
-          </a:p>
-        </p:txBody>
-      </p:sp>
-      <p:sp>
-        <p:nvSpPr>
-          <p:cNvPr id="5" name="TextBox 4"/>
-          <p:cNvSpPr txBox="1"/>
-          <p:nvPr/>
-        </p:nvSpPr>
-        <p:spPr>
-          <a:xfrm>
-            <a:off x="594360" y="4251960"/>
-            <a:ext cx="11002975" cy="347472"/>
-          </a:xfrm>
-          <a:prstGeom prst="rect">
-            <a:avLst/>
-          </a:prstGeom>
-          <a:noFill/>
-        </p:spPr>
-        <p:txBody>
-          <a:bodyPr wrap="square">
-            <a:spAutoFit/>
-          </a:bodyPr>
-          <a:lstStyle/>
-          <a:p>
-            <a:pPr algn="ctr"/>
-            <a:r>
-              <a:rPr sz="2200" b="0" i="1">
-                <a:solidFill>
-                  <a:srgbClr val="8C8C8C"/>
-                </a:solidFill>
-                <a:latin typeface="Arial"/>
-              </a:rPr>
-              <a:t/>
             </a:r>
           </a:p>
         </p:txBody>
@@ -6372,23 +5392,23 @@
         </p:nvSpPr>
         <p:spPr>
           <a:xfrm>
-            <a:off x="594360" y="2258568"/>
-            <a:ext cx="11002975" cy="685800"/>
-          </a:xfrm>
-          <a:prstGeom prst="rect">
-            <a:avLst/>
-          </a:prstGeom>
-          <a:noFill/>
-        </p:spPr>
-        <p:txBody>
-          <a:bodyPr wrap="square">
-            <a:spAutoFit/>
-          </a:bodyPr>
-          <a:lstStyle/>
-          <a:p>
-            <a:pPr algn="ctr"/>
-            <a:r>
-              <a:rPr sz="4400" b="1" i="0">
+            <a:off x="640080" y="2052828"/>
+            <a:ext cx="10911535" cy="731520"/>
+          </a:xfrm>
+          <a:prstGeom prst="rect">
+            <a:avLst/>
+          </a:prstGeom>
+          <a:noFill/>
+        </p:spPr>
+        <p:txBody>
+          <a:bodyPr wrap="square">
+            <a:spAutoFit/>
+          </a:bodyPr>
+          <a:lstStyle/>
+          <a:p>
+            <a:pPr algn="ctr"/>
+            <a:r>
+              <a:rPr sz="4800" b="1" i="0">
                 <a:solidFill>
                   <a:srgbClr val="FFFFFF"/>
                 </a:solidFill>
@@ -6407,99 +5427,29 @@
         </p:nvSpPr>
         <p:spPr>
           <a:xfrm>
-            <a:off x="594360" y="2980944"/>
-            <a:ext cx="11002975" cy="347472"/>
-          </a:xfrm>
-          <a:prstGeom prst="rect">
-            <a:avLst/>
-          </a:prstGeom>
-          <a:noFill/>
-        </p:spPr>
-        <p:txBody>
-          <a:bodyPr wrap="square">
-            <a:spAutoFit/>
-          </a:bodyPr>
-          <a:lstStyle/>
-          <a:p>
-            <a:pPr algn="ctr"/>
-            <a:r>
-              <a:rPr sz="2200" b="0" i="1">
-                <a:solidFill>
-                  <a:srgbClr val="8C8C8C"/>
-                </a:solidFill>
-                <a:latin typeface="Arial"/>
-              </a:rPr>
-              <a:t/>
-            </a:r>
-          </a:p>
-        </p:txBody>
-      </p:sp>
-      <p:sp>
-        <p:nvSpPr>
-          <p:cNvPr id="4" name="TextBox 3"/>
-          <p:cNvSpPr txBox="1"/>
-          <p:nvPr/>
-        </p:nvSpPr>
-        <p:spPr>
-          <a:xfrm>
-            <a:off x="594360" y="3529584"/>
-            <a:ext cx="11002975" cy="685800"/>
-          </a:xfrm>
-          <a:prstGeom prst="rect">
-            <a:avLst/>
-          </a:prstGeom>
-          <a:noFill/>
-        </p:spPr>
-        <p:txBody>
-          <a:bodyPr wrap="square">
-            <a:spAutoFit/>
-          </a:bodyPr>
-          <a:lstStyle/>
-          <a:p>
-            <a:pPr algn="ctr"/>
-            <a:r>
-              <a:rPr sz="4400" b="1" i="0">
+            <a:off x="640080" y="2985516"/>
+            <a:ext cx="10911535" cy="731520"/>
+          </a:xfrm>
+          <a:prstGeom prst="rect">
+            <a:avLst/>
+          </a:prstGeom>
+          <a:noFill/>
+        </p:spPr>
+        <p:txBody>
+          <a:bodyPr wrap="square">
+            <a:spAutoFit/>
+          </a:bodyPr>
+          <a:lstStyle/>
+          <a:p>
+            <a:pPr algn="ctr"/>
+            <a:r>
+              <a:rPr sz="4800" b="1" i="0">
                 <a:solidFill>
                   <a:srgbClr val="FFFFFF"/>
                 </a:solidFill>
                 <a:latin typeface="Arial"/>
               </a:rPr>
               <a:t>Que a bênção se derrame</a:t>
-            </a:r>
-          </a:p>
-        </p:txBody>
-      </p:sp>
-      <p:sp>
-        <p:nvSpPr>
-          <p:cNvPr id="5" name="TextBox 4"/>
-          <p:cNvSpPr txBox="1"/>
-          <p:nvPr/>
-        </p:nvSpPr>
-        <p:spPr>
-          <a:xfrm>
-            <a:off x="594360" y="4251960"/>
-            <a:ext cx="11002975" cy="347472"/>
-          </a:xfrm>
-          <a:prstGeom prst="rect">
-            <a:avLst/>
-          </a:prstGeom>
-          <a:noFill/>
-        </p:spPr>
-        <p:txBody>
-          <a:bodyPr wrap="square">
-            <a:spAutoFit/>
-          </a:bodyPr>
-          <a:lstStyle/>
-          <a:p>
-            <a:pPr algn="ctr"/>
-            <a:r>
-              <a:rPr sz="2200" b="0" i="1">
-                <a:solidFill>
-                  <a:srgbClr val="8C8C8C"/>
-                </a:solidFill>
-                <a:latin typeface="Arial"/>
-              </a:rPr>
-              <a:t/>
             </a:r>
           </a:p>
         </p:txBody>
@@ -6538,23 +5488,23 @@
         </p:nvSpPr>
         <p:spPr>
           <a:xfrm>
-            <a:off x="594360" y="2258568"/>
-            <a:ext cx="11002975" cy="685800"/>
-          </a:xfrm>
-          <a:prstGeom prst="rect">
-            <a:avLst/>
-          </a:prstGeom>
-          <a:noFill/>
-        </p:spPr>
-        <p:txBody>
-          <a:bodyPr wrap="square">
-            <a:spAutoFit/>
-          </a:bodyPr>
-          <a:lstStyle/>
-          <a:p>
-            <a:pPr algn="ctr"/>
-            <a:r>
-              <a:rPr sz="4400" b="1" i="0">
+            <a:off x="640080" y="2052828"/>
+            <a:ext cx="10911535" cy="731520"/>
+          </a:xfrm>
+          <a:prstGeom prst="rect">
+            <a:avLst/>
+          </a:prstGeom>
+          <a:noFill/>
+        </p:spPr>
+        <p:txBody>
+          <a:bodyPr wrap="square">
+            <a:spAutoFit/>
+          </a:bodyPr>
+          <a:lstStyle/>
+          <a:p>
+            <a:pPr algn="ctr"/>
+            <a:r>
+              <a:rPr sz="4800" b="1" i="0">
                 <a:solidFill>
                   <a:srgbClr val="FFFFFF"/>
                 </a:solidFill>
@@ -6573,99 +5523,29 @@
         </p:nvSpPr>
         <p:spPr>
           <a:xfrm>
-            <a:off x="594360" y="2980944"/>
-            <a:ext cx="11002975" cy="347472"/>
-          </a:xfrm>
-          <a:prstGeom prst="rect">
-            <a:avLst/>
-          </a:prstGeom>
-          <a:noFill/>
-        </p:spPr>
-        <p:txBody>
-          <a:bodyPr wrap="square">
-            <a:spAutoFit/>
-          </a:bodyPr>
-          <a:lstStyle/>
-          <a:p>
-            <a:pPr algn="ctr"/>
-            <a:r>
-              <a:rPr sz="2200" b="0" i="1">
-                <a:solidFill>
-                  <a:srgbClr val="8C8C8C"/>
-                </a:solidFill>
-                <a:latin typeface="Arial"/>
-              </a:rPr>
-              <a:t/>
-            </a:r>
-          </a:p>
-        </p:txBody>
-      </p:sp>
-      <p:sp>
-        <p:nvSpPr>
-          <p:cNvPr id="4" name="TextBox 3"/>
-          <p:cNvSpPr txBox="1"/>
-          <p:nvPr/>
-        </p:nvSpPr>
-        <p:spPr>
-          <a:xfrm>
-            <a:off x="594360" y="3529584"/>
-            <a:ext cx="11002975" cy="685800"/>
-          </a:xfrm>
-          <a:prstGeom prst="rect">
-            <a:avLst/>
-          </a:prstGeom>
-          <a:noFill/>
-        </p:spPr>
-        <p:txBody>
-          <a:bodyPr wrap="square">
-            <a:spAutoFit/>
-          </a:bodyPr>
-          <a:lstStyle/>
-          <a:p>
-            <a:pPr algn="ctr"/>
-            <a:r>
-              <a:rPr sz="4400" b="1" i="0">
+            <a:off x="640080" y="2985516"/>
+            <a:ext cx="10911535" cy="731520"/>
+          </a:xfrm>
+          <a:prstGeom prst="rect">
+            <a:avLst/>
+          </a:prstGeom>
+          <a:noFill/>
+        </p:spPr>
+        <p:txBody>
+          <a:bodyPr wrap="square">
+            <a:spAutoFit/>
+          </a:bodyPr>
+          <a:lstStyle/>
+          <a:p>
+            <a:pPr algn="ctr"/>
+            <a:r>
+              <a:rPr sz="4800" b="1" i="0">
                 <a:solidFill>
                   <a:srgbClr val="FFFFFF"/>
                 </a:solidFill>
                 <a:latin typeface="Arial"/>
               </a:rPr>
               <a:t>Tua entrada e saída</a:t>
-            </a:r>
-          </a:p>
-        </p:txBody>
-      </p:sp>
-      <p:sp>
-        <p:nvSpPr>
-          <p:cNvPr id="5" name="TextBox 4"/>
-          <p:cNvSpPr txBox="1"/>
-          <p:nvPr/>
-        </p:nvSpPr>
-        <p:spPr>
-          <a:xfrm>
-            <a:off x="594360" y="4251960"/>
-            <a:ext cx="11002975" cy="347472"/>
-          </a:xfrm>
-          <a:prstGeom prst="rect">
-            <a:avLst/>
-          </a:prstGeom>
-          <a:noFill/>
-        </p:spPr>
-        <p:txBody>
-          <a:bodyPr wrap="square">
-            <a:spAutoFit/>
-          </a:bodyPr>
-          <a:lstStyle/>
-          <a:p>
-            <a:pPr algn="ctr"/>
-            <a:r>
-              <a:rPr sz="2200" b="0" i="1">
-                <a:solidFill>
-                  <a:srgbClr val="8C8C8C"/>
-                </a:solidFill>
-                <a:latin typeface="Arial"/>
-              </a:rPr>
-              <a:t/>
             </a:r>
           </a:p>
         </p:txBody>
@@ -6704,23 +5584,23 @@
         </p:nvSpPr>
         <p:spPr>
           <a:xfrm>
-            <a:off x="594360" y="2258568"/>
-            <a:ext cx="11002975" cy="685800"/>
-          </a:xfrm>
-          <a:prstGeom prst="rect">
-            <a:avLst/>
-          </a:prstGeom>
-          <a:noFill/>
-        </p:spPr>
-        <p:txBody>
-          <a:bodyPr wrap="square">
-            <a:spAutoFit/>
-          </a:bodyPr>
-          <a:lstStyle/>
-          <a:p>
-            <a:pPr algn="ctr"/>
-            <a:r>
-              <a:rPr sz="4400" b="1" i="0">
+            <a:off x="640080" y="2052828"/>
+            <a:ext cx="10911535" cy="731520"/>
+          </a:xfrm>
+          <a:prstGeom prst="rect">
+            <a:avLst/>
+          </a:prstGeom>
+          <a:noFill/>
+        </p:spPr>
+        <p:txBody>
+          <a:bodyPr wrap="square">
+            <a:spAutoFit/>
+          </a:bodyPr>
+          <a:lstStyle/>
+          <a:p>
+            <a:pPr algn="ctr"/>
+            <a:r>
+              <a:rPr sz="4800" b="1" i="0">
                 <a:solidFill>
                   <a:srgbClr val="FFFFFF"/>
                 </a:solidFill>
@@ -6739,99 +5619,29 @@
         </p:nvSpPr>
         <p:spPr>
           <a:xfrm>
-            <a:off x="594360" y="2980944"/>
-            <a:ext cx="11002975" cy="347472"/>
-          </a:xfrm>
-          <a:prstGeom prst="rect">
-            <a:avLst/>
-          </a:prstGeom>
-          <a:noFill/>
-        </p:spPr>
-        <p:txBody>
-          <a:bodyPr wrap="square">
-            <a:spAutoFit/>
-          </a:bodyPr>
-          <a:lstStyle/>
-          <a:p>
-            <a:pPr algn="ctr"/>
-            <a:r>
-              <a:rPr sz="2200" b="0" i="1">
-                <a:solidFill>
-                  <a:srgbClr val="8C8C8C"/>
-                </a:solidFill>
-                <a:latin typeface="Arial"/>
-              </a:rPr>
-              <a:t/>
-            </a:r>
-          </a:p>
-        </p:txBody>
-      </p:sp>
-      <p:sp>
-        <p:nvSpPr>
-          <p:cNvPr id="4" name="TextBox 3"/>
-          <p:cNvSpPr txBox="1"/>
-          <p:nvPr/>
-        </p:nvSpPr>
-        <p:spPr>
-          <a:xfrm>
-            <a:off x="594360" y="3529584"/>
-            <a:ext cx="11002975" cy="685800"/>
-          </a:xfrm>
-          <a:prstGeom prst="rect">
-            <a:avLst/>
-          </a:prstGeom>
-          <a:noFill/>
-        </p:spPr>
-        <p:txBody>
-          <a:bodyPr wrap="square">
-            <a:spAutoFit/>
-          </a:bodyPr>
-          <a:lstStyle/>
-          <a:p>
-            <a:pPr algn="ctr"/>
-            <a:r>
-              <a:rPr sz="4400" b="1" i="0">
+            <a:off x="640080" y="2985516"/>
+            <a:ext cx="10911535" cy="731520"/>
+          </a:xfrm>
+          <a:prstGeom prst="rect">
+            <a:avLst/>
+          </a:prstGeom>
+          <a:noFill/>
+        </p:spPr>
+        <p:txBody>
+          <a:bodyPr wrap="square">
+            <a:spAutoFit/>
+          </a:bodyPr>
+          <a:lstStyle/>
+          <a:p>
+            <a:pPr algn="ctr"/>
+            <a:r>
+              <a:rPr sz="4800" b="1" i="0">
                 <a:solidFill>
                   <a:srgbClr val="FFFFFF"/>
                 </a:solidFill>
                 <a:latin typeface="Arial"/>
               </a:rPr>
               <a:t>É contigo, é por ti</a:t>
-            </a:r>
-          </a:p>
-        </p:txBody>
-      </p:sp>
-      <p:sp>
-        <p:nvSpPr>
-          <p:cNvPr id="5" name="TextBox 4"/>
-          <p:cNvSpPr txBox="1"/>
-          <p:nvPr/>
-        </p:nvSpPr>
-        <p:spPr>
-          <a:xfrm>
-            <a:off x="594360" y="4251960"/>
-            <a:ext cx="11002975" cy="347472"/>
-          </a:xfrm>
-          <a:prstGeom prst="rect">
-            <a:avLst/>
-          </a:prstGeom>
-          <a:noFill/>
-        </p:spPr>
-        <p:txBody>
-          <a:bodyPr wrap="square">
-            <a:spAutoFit/>
-          </a:bodyPr>
-          <a:lstStyle/>
-          <a:p>
-            <a:pPr algn="ctr"/>
-            <a:r>
-              <a:rPr sz="2200" b="0" i="1">
-                <a:solidFill>
-                  <a:srgbClr val="8C8C8C"/>
-                </a:solidFill>
-                <a:latin typeface="Arial"/>
-              </a:rPr>
-              <a:t/>
             </a:r>
           </a:p>
         </p:txBody>
@@ -6870,23 +5680,23 @@
         </p:nvSpPr>
         <p:spPr>
           <a:xfrm>
-            <a:off x="594360" y="1837944"/>
-            <a:ext cx="11002975" cy="685800"/>
-          </a:xfrm>
-          <a:prstGeom prst="rect">
-            <a:avLst/>
-          </a:prstGeom>
-          <a:noFill/>
-        </p:spPr>
-        <p:txBody>
-          <a:bodyPr wrap="square">
-            <a:spAutoFit/>
-          </a:bodyPr>
-          <a:lstStyle/>
-          <a:p>
-            <a:pPr algn="ctr"/>
-            <a:r>
-              <a:rPr sz="4400" b="1" i="0">
+            <a:off x="640080" y="1650492"/>
+            <a:ext cx="10911535" cy="731520"/>
+          </a:xfrm>
+          <a:prstGeom prst="rect">
+            <a:avLst/>
+          </a:prstGeom>
+          <a:noFill/>
+        </p:spPr>
+        <p:txBody>
+          <a:bodyPr wrap="square">
+            <a:spAutoFit/>
+          </a:bodyPr>
+          <a:lstStyle/>
+          <a:p>
+            <a:pPr algn="ctr"/>
+            <a:r>
+              <a:rPr sz="4800" b="1" i="0">
                 <a:solidFill>
                   <a:srgbClr val="FFFFFF"/>
                 </a:solidFill>
@@ -6905,8 +5715,8 @@
         </p:nvSpPr>
         <p:spPr>
           <a:xfrm>
-            <a:off x="594360" y="2560320"/>
-            <a:ext cx="11002975" cy="384048"/>
+            <a:off x="640080" y="2418588"/>
+            <a:ext cx="10911535" cy="365760"/>
           </a:xfrm>
           <a:prstGeom prst="rect">
             <a:avLst/>
@@ -6923,7 +5733,7 @@
             <a:r>
               <a:rPr sz="2400" b="0" i="1">
                 <a:solidFill>
-                  <a:srgbClr val="B4B4B4"/>
+                  <a:srgbClr val="AAAAAA"/>
                 </a:solidFill>
                 <a:latin typeface="Arial"/>
               </a:rPr>
@@ -6940,8 +5750,78 @@
         </p:nvSpPr>
         <p:spPr>
           <a:xfrm>
-            <a:off x="594360" y="2980944"/>
-            <a:ext cx="11002975" cy="347472"/>
+            <a:off x="640080" y="2985516"/>
+            <a:ext cx="10911535" cy="731520"/>
+          </a:xfrm>
+          <a:prstGeom prst="rect">
+            <a:avLst/>
+          </a:prstGeom>
+          <a:noFill/>
+        </p:spPr>
+        <p:txBody>
+          <a:bodyPr wrap="square">
+            <a:spAutoFit/>
+          </a:bodyPr>
+          <a:lstStyle/>
+          <a:p>
+            <a:pPr algn="ctr"/>
+            <a:r>
+              <a:rPr sz="4800" b="1" i="0">
+                <a:solidFill>
+                  <a:srgbClr val="FFFFFF"/>
+                </a:solidFill>
+                <a:latin typeface="Arial"/>
+              </a:rPr>
+              <a:t>平安恵み　与えるように</a:t>
+            </a:r>
+          </a:p>
+        </p:txBody>
+      </p:sp>
+      <p:sp>
+        <p:nvSpPr>
+          <p:cNvPr id="5" name="TextBox 4"/>
+          <p:cNvSpPr txBox="1"/>
+          <p:nvPr/>
+        </p:nvSpPr>
+        <p:spPr>
+          <a:xfrm>
+            <a:off x="640080" y="3753612"/>
+            <a:ext cx="10911535" cy="365760"/>
+          </a:xfrm>
+          <a:prstGeom prst="rect">
+            <a:avLst/>
+          </a:prstGeom>
+          <a:noFill/>
+        </p:spPr>
+        <p:txBody>
+          <a:bodyPr wrap="square">
+            <a:spAutoFit/>
+          </a:bodyPr>
+          <a:lstStyle/>
+          <a:p>
+            <a:pPr algn="ctr"/>
+            <a:r>
+              <a:rPr sz="2400" b="0" i="1">
+                <a:solidFill>
+                  <a:srgbClr val="AAAAAA"/>
+                </a:solidFill>
+                <a:latin typeface="Arial"/>
+              </a:rPr>
+              <a:t>heian megumi ataeru youni</a:t>
+            </a:r>
+          </a:p>
+        </p:txBody>
+      </p:sp>
+      <p:sp>
+        <p:nvSpPr>
+          <p:cNvPr id="6" name="TextBox 5"/>
+          <p:cNvSpPr txBox="1"/>
+          <p:nvPr/>
+        </p:nvSpPr>
+        <p:spPr>
+          <a:xfrm>
+            <a:off x="640080" y="4530852"/>
+            <a:ext cx="10911535" cy="310896"/>
           </a:xfrm>
           <a:prstGeom prst="rect">
             <a:avLst/>
@@ -6958,81 +5838,11 @@
             <a:r>
               <a:rPr sz="2000" b="0" i="1">
                 <a:solidFill>
-                  <a:srgbClr val="8C8C8C"/>
-                </a:solidFill>
-                <a:latin typeface="Arial"/>
-              </a:rPr>
-              <a:t/>
-            </a:r>
-          </a:p>
-        </p:txBody>
-      </p:sp>
-      <p:sp>
-        <p:nvSpPr>
-          <p:cNvPr id="5" name="TextBox 4"/>
-          <p:cNvSpPr txBox="1"/>
-          <p:nvPr/>
-        </p:nvSpPr>
-        <p:spPr>
-          <a:xfrm>
-            <a:off x="594360" y="3529584"/>
-            <a:ext cx="11002975" cy="685800"/>
-          </a:xfrm>
-          <a:prstGeom prst="rect">
-            <a:avLst/>
-          </a:prstGeom>
-          <a:noFill/>
-        </p:spPr>
-        <p:txBody>
-          <a:bodyPr wrap="square">
-            <a:spAutoFit/>
-          </a:bodyPr>
-          <a:lstStyle/>
-          <a:p>
-            <a:pPr algn="ctr"/>
-            <a:r>
-              <a:rPr sz="4400" b="1" i="0">
-                <a:solidFill>
-                  <a:srgbClr val="FFFFFF"/>
-                </a:solidFill>
-                <a:latin typeface="Arial"/>
-              </a:rPr>
-              <a:t>平安恵み　与えるように</a:t>
-            </a:r>
-          </a:p>
-        </p:txBody>
-      </p:sp>
-      <p:sp>
-        <p:nvSpPr>
-          <p:cNvPr id="6" name="TextBox 5"/>
-          <p:cNvSpPr txBox="1"/>
-          <p:nvPr/>
-        </p:nvSpPr>
-        <p:spPr>
-          <a:xfrm>
-            <a:off x="594360" y="4251960"/>
-            <a:ext cx="11002975" cy="384048"/>
-          </a:xfrm>
-          <a:prstGeom prst="rect">
-            <a:avLst/>
-          </a:prstGeom>
-          <a:noFill/>
-        </p:spPr>
-        <p:txBody>
-          <a:bodyPr wrap="square">
-            <a:spAutoFit/>
-          </a:bodyPr>
-          <a:lstStyle/>
-          <a:p>
-            <a:pPr algn="ctr"/>
-            <a:r>
-              <a:rPr sz="2400" b="0" i="1">
-                <a:solidFill>
-                  <a:srgbClr val="B4B4B4"/>
-                </a:solidFill>
-                <a:latin typeface="Arial"/>
-              </a:rPr>
-              <a:t>heian megumi ataeru youni</a:t>
+                  <a:srgbClr val="828282"/>
+                </a:solidFill>
+                <a:latin typeface="Arial"/>
+              </a:rPr>
+              <a:t>Até mil gerações</a:t>
             </a:r>
           </a:p>
         </p:txBody>
@@ -7045,8 +5855,8 @@
         </p:nvSpPr>
         <p:spPr>
           <a:xfrm>
-            <a:off x="594360" y="4672584"/>
-            <a:ext cx="11002975" cy="347472"/>
+            <a:off x="640080" y="4896612"/>
+            <a:ext cx="10911535" cy="310896"/>
           </a:xfrm>
           <a:prstGeom prst="rect">
             <a:avLst/>
@@ -7063,11 +5873,11 @@
             <a:r>
               <a:rPr sz="2000" b="0" i="1">
                 <a:solidFill>
-                  <a:srgbClr val="8C8C8C"/>
-                </a:solidFill>
-                <a:latin typeface="Arial"/>
-              </a:rPr>
-              <a:t/>
+                  <a:srgbClr val="828282"/>
+                </a:solidFill>
+                <a:latin typeface="Arial"/>
+              </a:rPr>
+              <a:t>Tua família e teus filhos</a:t>
             </a:r>
           </a:p>
         </p:txBody>
@@ -7106,23 +5916,23 @@
         </p:nvSpPr>
         <p:spPr>
           <a:xfrm>
-            <a:off x="594360" y="2683764"/>
-            <a:ext cx="11002975" cy="685800"/>
-          </a:xfrm>
-          <a:prstGeom prst="rect">
-            <a:avLst/>
-          </a:prstGeom>
-          <a:noFill/>
-        </p:spPr>
-        <p:txBody>
-          <a:bodyPr wrap="square">
-            <a:spAutoFit/>
-          </a:bodyPr>
-          <a:lstStyle/>
-          <a:p>
-            <a:pPr algn="ctr"/>
-            <a:r>
-              <a:rPr sz="4400" b="1" i="0">
+            <a:off x="640080" y="2500884"/>
+            <a:ext cx="10911535" cy="731520"/>
+          </a:xfrm>
+          <a:prstGeom prst="rect">
+            <a:avLst/>
+          </a:prstGeom>
+          <a:noFill/>
+        </p:spPr>
+        <p:txBody>
+          <a:bodyPr wrap="square">
+            <a:spAutoFit/>
+          </a:bodyPr>
+          <a:lstStyle/>
+          <a:p>
+            <a:pPr algn="ctr"/>
+            <a:r>
+              <a:rPr sz="4800" b="1" i="0">
                 <a:solidFill>
                   <a:srgbClr val="FFFFFF"/>
                 </a:solidFill>
@@ -7141,8 +5951,8 @@
         </p:nvSpPr>
         <p:spPr>
           <a:xfrm>
-            <a:off x="594360" y="3406140"/>
-            <a:ext cx="11002975" cy="384048"/>
+            <a:off x="640080" y="3268980"/>
+            <a:ext cx="10911535" cy="365760"/>
           </a:xfrm>
           <a:prstGeom prst="rect">
             <a:avLst/>
@@ -7159,7 +5969,7 @@
             <a:r>
               <a:rPr sz="2400" b="0" i="1">
                 <a:solidFill>
-                  <a:srgbClr val="B4B4B4"/>
+                  <a:srgbClr val="AAAAAA"/>
                 </a:solidFill>
                 <a:latin typeface="Arial"/>
               </a:rPr>
@@ -7176,8 +5986,8 @@
         </p:nvSpPr>
         <p:spPr>
           <a:xfrm>
-            <a:off x="594360" y="3826764"/>
-            <a:ext cx="11002975" cy="347472"/>
+            <a:off x="640080" y="4046220"/>
+            <a:ext cx="10911535" cy="310896"/>
           </a:xfrm>
           <a:prstGeom prst="rect">
             <a:avLst/>
@@ -7194,11 +6004,11 @@
             <a:r>
               <a:rPr sz="2000" b="0" i="1">
                 <a:solidFill>
-                  <a:srgbClr val="8C8C8C"/>
-                </a:solidFill>
-                <a:latin typeface="Arial"/>
-              </a:rPr>
-              <a:t/>
+                  <a:srgbClr val="828282"/>
+                </a:solidFill>
+                <a:latin typeface="Arial"/>
+              </a:rPr>
+              <a:t>E os filhos de teus filhos</a:t>
             </a:r>
           </a:p>
         </p:txBody>
@@ -7237,23 +6047,23 @@
         </p:nvSpPr>
         <p:spPr>
           <a:xfrm>
-            <a:off x="594360" y="2258568"/>
-            <a:ext cx="11002975" cy="685800"/>
-          </a:xfrm>
-          <a:prstGeom prst="rect">
-            <a:avLst/>
-          </a:prstGeom>
-          <a:noFill/>
-        </p:spPr>
-        <p:txBody>
-          <a:bodyPr wrap="square">
-            <a:spAutoFit/>
-          </a:bodyPr>
-          <a:lstStyle/>
-          <a:p>
-            <a:pPr algn="ctr"/>
-            <a:r>
-              <a:rPr sz="4400" b="1" i="0">
+            <a:off x="640080" y="2052828"/>
+            <a:ext cx="10911535" cy="731520"/>
+          </a:xfrm>
+          <a:prstGeom prst="rect">
+            <a:avLst/>
+          </a:prstGeom>
+          <a:noFill/>
+        </p:spPr>
+        <p:txBody>
+          <a:bodyPr wrap="square">
+            <a:spAutoFit/>
+          </a:bodyPr>
+          <a:lstStyle/>
+          <a:p>
+            <a:pPr algn="ctr"/>
+            <a:r>
+              <a:rPr sz="4800" b="1" i="0">
                 <a:solidFill>
                   <a:srgbClr val="FFFFFF"/>
                 </a:solidFill>
@@ -7272,99 +6082,29 @@
         </p:nvSpPr>
         <p:spPr>
           <a:xfrm>
-            <a:off x="594360" y="2980944"/>
-            <a:ext cx="11002975" cy="347472"/>
-          </a:xfrm>
-          <a:prstGeom prst="rect">
-            <a:avLst/>
-          </a:prstGeom>
-          <a:noFill/>
-        </p:spPr>
-        <p:txBody>
-          <a:bodyPr wrap="square">
-            <a:spAutoFit/>
-          </a:bodyPr>
-          <a:lstStyle/>
-          <a:p>
-            <a:pPr algn="ctr"/>
-            <a:r>
-              <a:rPr sz="2200" b="0" i="1">
-                <a:solidFill>
-                  <a:srgbClr val="8C8C8C"/>
-                </a:solidFill>
-                <a:latin typeface="Arial"/>
-              </a:rPr>
-              <a:t/>
-            </a:r>
-          </a:p>
-        </p:txBody>
-      </p:sp>
-      <p:sp>
-        <p:nvSpPr>
-          <p:cNvPr id="4" name="TextBox 3"/>
-          <p:cNvSpPr txBox="1"/>
-          <p:nvPr/>
-        </p:nvSpPr>
-        <p:spPr>
-          <a:xfrm>
-            <a:off x="594360" y="3529584"/>
-            <a:ext cx="11002975" cy="685800"/>
-          </a:xfrm>
-          <a:prstGeom prst="rect">
-            <a:avLst/>
-          </a:prstGeom>
-          <a:noFill/>
-        </p:spPr>
-        <p:txBody>
-          <a:bodyPr wrap="square">
-            <a:spAutoFit/>
-          </a:bodyPr>
-          <a:lstStyle/>
-          <a:p>
-            <a:pPr algn="ctr"/>
-            <a:r>
-              <a:rPr sz="4400" b="1" i="0">
+            <a:off x="640080" y="2985516"/>
+            <a:ext cx="10911535" cy="731520"/>
+          </a:xfrm>
+          <a:prstGeom prst="rect">
+            <a:avLst/>
+          </a:prstGeom>
+          <a:noFill/>
+        </p:spPr>
+        <p:txBody>
+          <a:bodyPr wrap="square">
+            <a:spAutoFit/>
+          </a:bodyPr>
+          <a:lstStyle/>
+          <a:p>
+            <a:pPr algn="ctr"/>
+            <a:r>
+              <a:rPr sz="4800" b="1" i="0">
                 <a:solidFill>
                   <a:srgbClr val="FFFFFF"/>
                 </a:solidFill>
                 <a:latin typeface="Arial"/>
               </a:rPr>
               <a:t>E faça brilhar Seu rosto em ti</a:t>
-            </a:r>
-          </a:p>
-        </p:txBody>
-      </p:sp>
-      <p:sp>
-        <p:nvSpPr>
-          <p:cNvPr id="5" name="TextBox 4"/>
-          <p:cNvSpPr txBox="1"/>
-          <p:nvPr/>
-        </p:nvSpPr>
-        <p:spPr>
-          <a:xfrm>
-            <a:off x="594360" y="4251960"/>
-            <a:ext cx="11002975" cy="347472"/>
-          </a:xfrm>
-          <a:prstGeom prst="rect">
-            <a:avLst/>
-          </a:prstGeom>
-          <a:noFill/>
-        </p:spPr>
-        <p:txBody>
-          <a:bodyPr wrap="square">
-            <a:spAutoFit/>
-          </a:bodyPr>
-          <a:lstStyle/>
-          <a:p>
-            <a:pPr algn="ctr"/>
-            <a:r>
-              <a:rPr sz="2200" b="0" i="1">
-                <a:solidFill>
-                  <a:srgbClr val="8C8C8C"/>
-                </a:solidFill>
-                <a:latin typeface="Arial"/>
-              </a:rPr>
-              <a:t/>
             </a:r>
           </a:p>
         </p:txBody>
@@ -7403,23 +6143,23 @@
         </p:nvSpPr>
         <p:spPr>
           <a:xfrm>
-            <a:off x="594360" y="2258568"/>
-            <a:ext cx="11002975" cy="685800"/>
-          </a:xfrm>
-          <a:prstGeom prst="rect">
-            <a:avLst/>
-          </a:prstGeom>
-          <a:noFill/>
-        </p:spPr>
-        <p:txBody>
-          <a:bodyPr wrap="square">
-            <a:spAutoFit/>
-          </a:bodyPr>
-          <a:lstStyle/>
-          <a:p>
-            <a:pPr algn="ctr"/>
-            <a:r>
-              <a:rPr sz="4400" b="1" i="0">
+            <a:off x="640080" y="2052828"/>
+            <a:ext cx="10911535" cy="731520"/>
+          </a:xfrm>
+          <a:prstGeom prst="rect">
+            <a:avLst/>
+          </a:prstGeom>
+          <a:noFill/>
+        </p:spPr>
+        <p:txBody>
+          <a:bodyPr wrap="square">
+            <a:spAutoFit/>
+          </a:bodyPr>
+          <a:lstStyle/>
+          <a:p>
+            <a:pPr algn="ctr"/>
+            <a:r>
+              <a:rPr sz="4800" b="1" i="0">
                 <a:solidFill>
                   <a:srgbClr val="FFFFFF"/>
                 </a:solidFill>
@@ -7438,99 +6178,29 @@
         </p:nvSpPr>
         <p:spPr>
           <a:xfrm>
-            <a:off x="594360" y="2980944"/>
-            <a:ext cx="11002975" cy="347472"/>
-          </a:xfrm>
-          <a:prstGeom prst="rect">
-            <a:avLst/>
-          </a:prstGeom>
-          <a:noFill/>
-        </p:spPr>
-        <p:txBody>
-          <a:bodyPr wrap="square">
-            <a:spAutoFit/>
-          </a:bodyPr>
-          <a:lstStyle/>
-          <a:p>
-            <a:pPr algn="ctr"/>
-            <a:r>
-              <a:rPr sz="2200" b="0" i="1">
-                <a:solidFill>
-                  <a:srgbClr val="8C8C8C"/>
-                </a:solidFill>
-                <a:latin typeface="Arial"/>
-              </a:rPr>
-              <a:t/>
-            </a:r>
-          </a:p>
-        </p:txBody>
-      </p:sp>
-      <p:sp>
-        <p:nvSpPr>
-          <p:cNvPr id="4" name="TextBox 3"/>
-          <p:cNvSpPr txBox="1"/>
-          <p:nvPr/>
-        </p:nvSpPr>
-        <p:spPr>
-          <a:xfrm>
-            <a:off x="594360" y="3529584"/>
-            <a:ext cx="11002975" cy="685800"/>
-          </a:xfrm>
-          <a:prstGeom prst="rect">
-            <a:avLst/>
-          </a:prstGeom>
-          <a:noFill/>
-        </p:spPr>
-        <p:txBody>
-          <a:bodyPr wrap="square">
-            <a:spAutoFit/>
-          </a:bodyPr>
-          <a:lstStyle/>
-          <a:p>
-            <a:pPr algn="ctr"/>
-            <a:r>
-              <a:rPr sz="4400" b="1" i="0">
+            <a:off x="640080" y="2985516"/>
+            <a:ext cx="10911535" cy="731520"/>
+          </a:xfrm>
+          <a:prstGeom prst="rect">
+            <a:avLst/>
+          </a:prstGeom>
+          <a:noFill/>
+        </p:spPr>
+        <p:txBody>
+          <a:bodyPr wrap="square">
+            <a:spAutoFit/>
+          </a:bodyPr>
+          <a:lstStyle/>
+          <a:p>
+            <a:pPr algn="ctr"/>
+            <a:r>
+              <a:rPr sz="4800" b="1" i="0">
                 <a:solidFill>
                   <a:srgbClr val="FFFFFF"/>
                 </a:solidFill>
                 <a:latin typeface="Arial"/>
               </a:rPr>
               <a:t>Que a bênção se derrame</a:t>
-            </a:r>
-          </a:p>
-        </p:txBody>
-      </p:sp>
-      <p:sp>
-        <p:nvSpPr>
-          <p:cNvPr id="5" name="TextBox 4"/>
-          <p:cNvSpPr txBox="1"/>
-          <p:nvPr/>
-        </p:nvSpPr>
-        <p:spPr>
-          <a:xfrm>
-            <a:off x="594360" y="4251960"/>
-            <a:ext cx="11002975" cy="347472"/>
-          </a:xfrm>
-          <a:prstGeom prst="rect">
-            <a:avLst/>
-          </a:prstGeom>
-          <a:noFill/>
-        </p:spPr>
-        <p:txBody>
-          <a:bodyPr wrap="square">
-            <a:spAutoFit/>
-          </a:bodyPr>
-          <a:lstStyle/>
-          <a:p>
-            <a:pPr algn="ctr"/>
-            <a:r>
-              <a:rPr sz="2200" b="0" i="1">
-                <a:solidFill>
-                  <a:srgbClr val="8C8C8C"/>
-                </a:solidFill>
-                <a:latin typeface="Arial"/>
-              </a:rPr>
-              <a:t/>
             </a:r>
           </a:p>
         </p:txBody>
@@ -7569,23 +6239,23 @@
         </p:nvSpPr>
         <p:spPr>
           <a:xfrm>
-            <a:off x="594360" y="2258568"/>
-            <a:ext cx="11002975" cy="685800"/>
-          </a:xfrm>
-          <a:prstGeom prst="rect">
-            <a:avLst/>
-          </a:prstGeom>
-          <a:noFill/>
-        </p:spPr>
-        <p:txBody>
-          <a:bodyPr wrap="square">
-            <a:spAutoFit/>
-          </a:bodyPr>
-          <a:lstStyle/>
-          <a:p>
-            <a:pPr algn="ctr"/>
-            <a:r>
-              <a:rPr sz="4400" b="1" i="0">
+            <a:off x="640080" y="2052828"/>
+            <a:ext cx="10911535" cy="731520"/>
+          </a:xfrm>
+          <a:prstGeom prst="rect">
+            <a:avLst/>
+          </a:prstGeom>
+          <a:noFill/>
+        </p:spPr>
+        <p:txBody>
+          <a:bodyPr wrap="square">
+            <a:spAutoFit/>
+          </a:bodyPr>
+          <a:lstStyle/>
+          <a:p>
+            <a:pPr algn="ctr"/>
+            <a:r>
+              <a:rPr sz="4800" b="1" i="0">
                 <a:solidFill>
                   <a:srgbClr val="FFFFFF"/>
                 </a:solidFill>
@@ -7604,99 +6274,29 @@
         </p:nvSpPr>
         <p:spPr>
           <a:xfrm>
-            <a:off x="594360" y="2980944"/>
-            <a:ext cx="11002975" cy="347472"/>
-          </a:xfrm>
-          <a:prstGeom prst="rect">
-            <a:avLst/>
-          </a:prstGeom>
-          <a:noFill/>
-        </p:spPr>
-        <p:txBody>
-          <a:bodyPr wrap="square">
-            <a:spAutoFit/>
-          </a:bodyPr>
-          <a:lstStyle/>
-          <a:p>
-            <a:pPr algn="ctr"/>
-            <a:r>
-              <a:rPr sz="2200" b="0" i="1">
-                <a:solidFill>
-                  <a:srgbClr val="8C8C8C"/>
-                </a:solidFill>
-                <a:latin typeface="Arial"/>
-              </a:rPr>
-              <a:t/>
-            </a:r>
-          </a:p>
-        </p:txBody>
-      </p:sp>
-      <p:sp>
-        <p:nvSpPr>
-          <p:cNvPr id="4" name="TextBox 3"/>
-          <p:cNvSpPr txBox="1"/>
-          <p:nvPr/>
-        </p:nvSpPr>
-        <p:spPr>
-          <a:xfrm>
-            <a:off x="594360" y="3529584"/>
-            <a:ext cx="11002975" cy="685800"/>
-          </a:xfrm>
-          <a:prstGeom prst="rect">
-            <a:avLst/>
-          </a:prstGeom>
-          <a:noFill/>
-        </p:spPr>
-        <p:txBody>
-          <a:bodyPr wrap="square">
-            <a:spAutoFit/>
-          </a:bodyPr>
-          <a:lstStyle/>
-          <a:p>
-            <a:pPr algn="ctr"/>
-            <a:r>
-              <a:rPr sz="4400" b="1" i="0">
+            <a:off x="640080" y="2985516"/>
+            <a:ext cx="10911535" cy="731520"/>
+          </a:xfrm>
+          <a:prstGeom prst="rect">
+            <a:avLst/>
+          </a:prstGeom>
+          <a:noFill/>
+        </p:spPr>
+        <p:txBody>
+          <a:bodyPr wrap="square">
+            <a:spAutoFit/>
+          </a:bodyPr>
+          <a:lstStyle/>
+          <a:p>
+            <a:pPr algn="ctr"/>
+            <a:r>
+              <a:rPr sz="4800" b="1" i="0">
                 <a:solidFill>
                   <a:srgbClr val="FFFFFF"/>
                 </a:solidFill>
                 <a:latin typeface="Arial"/>
               </a:rPr>
               <a:t>Tua entrada e saída</a:t>
-            </a:r>
-          </a:p>
-        </p:txBody>
-      </p:sp>
-      <p:sp>
-        <p:nvSpPr>
-          <p:cNvPr id="5" name="TextBox 4"/>
-          <p:cNvSpPr txBox="1"/>
-          <p:nvPr/>
-        </p:nvSpPr>
-        <p:spPr>
-          <a:xfrm>
-            <a:off x="594360" y="4251960"/>
-            <a:ext cx="11002975" cy="347472"/>
-          </a:xfrm>
-          <a:prstGeom prst="rect">
-            <a:avLst/>
-          </a:prstGeom>
-          <a:noFill/>
-        </p:spPr>
-        <p:txBody>
-          <a:bodyPr wrap="square">
-            <a:spAutoFit/>
-          </a:bodyPr>
-          <a:lstStyle/>
-          <a:p>
-            <a:pPr algn="ctr"/>
-            <a:r>
-              <a:rPr sz="2200" b="0" i="1">
-                <a:solidFill>
-                  <a:srgbClr val="8C8C8C"/>
-                </a:solidFill>
-                <a:latin typeface="Arial"/>
-              </a:rPr>
-              <a:t/>
             </a:r>
           </a:p>
         </p:txBody>
@@ -7735,23 +6335,23 @@
         </p:nvSpPr>
         <p:spPr>
           <a:xfrm>
-            <a:off x="594360" y="2258568"/>
-            <a:ext cx="11002975" cy="685800"/>
-          </a:xfrm>
-          <a:prstGeom prst="rect">
-            <a:avLst/>
-          </a:prstGeom>
-          <a:noFill/>
-        </p:spPr>
-        <p:txBody>
-          <a:bodyPr wrap="square">
-            <a:spAutoFit/>
-          </a:bodyPr>
-          <a:lstStyle/>
-          <a:p>
-            <a:pPr algn="ctr"/>
-            <a:r>
-              <a:rPr sz="4400" b="1" i="0">
+            <a:off x="640080" y="2052828"/>
+            <a:ext cx="10911535" cy="731520"/>
+          </a:xfrm>
+          <a:prstGeom prst="rect">
+            <a:avLst/>
+          </a:prstGeom>
+          <a:noFill/>
+        </p:spPr>
+        <p:txBody>
+          <a:bodyPr wrap="square">
+            <a:spAutoFit/>
+          </a:bodyPr>
+          <a:lstStyle/>
+          <a:p>
+            <a:pPr algn="ctr"/>
+            <a:r>
+              <a:rPr sz="4800" b="1" i="0">
                 <a:solidFill>
                   <a:srgbClr val="FFFFFF"/>
                 </a:solidFill>
@@ -7770,99 +6370,29 @@
         </p:nvSpPr>
         <p:spPr>
           <a:xfrm>
-            <a:off x="594360" y="2980944"/>
-            <a:ext cx="11002975" cy="347472"/>
-          </a:xfrm>
-          <a:prstGeom prst="rect">
-            <a:avLst/>
-          </a:prstGeom>
-          <a:noFill/>
-        </p:spPr>
-        <p:txBody>
-          <a:bodyPr wrap="square">
-            <a:spAutoFit/>
-          </a:bodyPr>
-          <a:lstStyle/>
-          <a:p>
-            <a:pPr algn="ctr"/>
-            <a:r>
-              <a:rPr sz="2200" b="0" i="1">
-                <a:solidFill>
-                  <a:srgbClr val="8C8C8C"/>
-                </a:solidFill>
-                <a:latin typeface="Arial"/>
-              </a:rPr>
-              <a:t/>
-            </a:r>
-          </a:p>
-        </p:txBody>
-      </p:sp>
-      <p:sp>
-        <p:nvSpPr>
-          <p:cNvPr id="4" name="TextBox 3"/>
-          <p:cNvSpPr txBox="1"/>
-          <p:nvPr/>
-        </p:nvSpPr>
-        <p:spPr>
-          <a:xfrm>
-            <a:off x="594360" y="3529584"/>
-            <a:ext cx="11002975" cy="685800"/>
-          </a:xfrm>
-          <a:prstGeom prst="rect">
-            <a:avLst/>
-          </a:prstGeom>
-          <a:noFill/>
-        </p:spPr>
-        <p:txBody>
-          <a:bodyPr wrap="square">
-            <a:spAutoFit/>
-          </a:bodyPr>
-          <a:lstStyle/>
-          <a:p>
-            <a:pPr algn="ctr"/>
-            <a:r>
-              <a:rPr sz="4400" b="1" i="0">
+            <a:off x="640080" y="2985516"/>
+            <a:ext cx="10911535" cy="731520"/>
+          </a:xfrm>
+          <a:prstGeom prst="rect">
+            <a:avLst/>
+          </a:prstGeom>
+          <a:noFill/>
+        </p:spPr>
+        <p:txBody>
+          <a:bodyPr wrap="square">
+            <a:spAutoFit/>
+          </a:bodyPr>
+          <a:lstStyle/>
+          <a:p>
+            <a:pPr algn="ctr"/>
+            <a:r>
+              <a:rPr sz="4800" b="1" i="0">
                 <a:solidFill>
                   <a:srgbClr val="FFFFFF"/>
                 </a:solidFill>
                 <a:latin typeface="Arial"/>
               </a:rPr>
               <a:t>É contigo, é por ti</a:t>
-            </a:r>
-          </a:p>
-        </p:txBody>
-      </p:sp>
-      <p:sp>
-        <p:nvSpPr>
-          <p:cNvPr id="5" name="TextBox 4"/>
-          <p:cNvSpPr txBox="1"/>
-          <p:nvPr/>
-        </p:nvSpPr>
-        <p:spPr>
-          <a:xfrm>
-            <a:off x="594360" y="4251960"/>
-            <a:ext cx="11002975" cy="347472"/>
-          </a:xfrm>
-          <a:prstGeom prst="rect">
-            <a:avLst/>
-          </a:prstGeom>
-          <a:noFill/>
-        </p:spPr>
-        <p:txBody>
-          <a:bodyPr wrap="square">
-            <a:spAutoFit/>
-          </a:bodyPr>
-          <a:lstStyle/>
-          <a:p>
-            <a:pPr algn="ctr"/>
-            <a:r>
-              <a:rPr sz="2200" b="0" i="1">
-                <a:solidFill>
-                  <a:srgbClr val="8C8C8C"/>
-                </a:solidFill>
-                <a:latin typeface="Arial"/>
-              </a:rPr>
-              <a:t/>
             </a:r>
           </a:p>
         </p:txBody>
@@ -7901,23 +6431,23 @@
         </p:nvSpPr>
         <p:spPr>
           <a:xfrm>
-            <a:off x="594360" y="2258568"/>
-            <a:ext cx="11002975" cy="685800"/>
-          </a:xfrm>
-          <a:prstGeom prst="rect">
-            <a:avLst/>
-          </a:prstGeom>
-          <a:noFill/>
-        </p:spPr>
-        <p:txBody>
-          <a:bodyPr wrap="square">
-            <a:spAutoFit/>
-          </a:bodyPr>
-          <a:lstStyle/>
-          <a:p>
-            <a:pPr algn="ctr"/>
-            <a:r>
-              <a:rPr sz="4400" b="1" i="0">
+            <a:off x="640080" y="2052828"/>
+            <a:ext cx="10911535" cy="731520"/>
+          </a:xfrm>
+          <a:prstGeom prst="rect">
+            <a:avLst/>
+          </a:prstGeom>
+          <a:noFill/>
+        </p:spPr>
+        <p:txBody>
+          <a:bodyPr wrap="square">
+            <a:spAutoFit/>
+          </a:bodyPr>
+          <a:lstStyle/>
+          <a:p>
+            <a:pPr algn="ctr"/>
+            <a:r>
+              <a:rPr sz="4800" b="1" i="0">
                 <a:solidFill>
                   <a:srgbClr val="FFFFFF"/>
                 </a:solidFill>
@@ -7936,99 +6466,29 @@
         </p:nvSpPr>
         <p:spPr>
           <a:xfrm>
-            <a:off x="594360" y="2980944"/>
-            <a:ext cx="11002975" cy="347472"/>
-          </a:xfrm>
-          <a:prstGeom prst="rect">
-            <a:avLst/>
-          </a:prstGeom>
-          <a:noFill/>
-        </p:spPr>
-        <p:txBody>
-          <a:bodyPr wrap="square">
-            <a:spAutoFit/>
-          </a:bodyPr>
-          <a:lstStyle/>
-          <a:p>
-            <a:pPr algn="ctr"/>
-            <a:r>
-              <a:rPr sz="2200" b="0" i="1">
-                <a:solidFill>
-                  <a:srgbClr val="8C8C8C"/>
-                </a:solidFill>
-                <a:latin typeface="Arial"/>
-              </a:rPr>
-              <a:t/>
-            </a:r>
-          </a:p>
-        </p:txBody>
-      </p:sp>
-      <p:sp>
-        <p:nvSpPr>
-          <p:cNvPr id="4" name="TextBox 3"/>
-          <p:cNvSpPr txBox="1"/>
-          <p:nvPr/>
-        </p:nvSpPr>
-        <p:spPr>
-          <a:xfrm>
-            <a:off x="594360" y="3529584"/>
-            <a:ext cx="11002975" cy="685800"/>
-          </a:xfrm>
-          <a:prstGeom prst="rect">
-            <a:avLst/>
-          </a:prstGeom>
-          <a:noFill/>
-        </p:spPr>
-        <p:txBody>
-          <a:bodyPr wrap="square">
-            <a:spAutoFit/>
-          </a:bodyPr>
-          <a:lstStyle/>
-          <a:p>
-            <a:pPr algn="ctr"/>
-            <a:r>
-              <a:rPr sz="4400" b="1" i="0">
+            <a:off x="640080" y="2985516"/>
+            <a:ext cx="10911535" cy="731520"/>
+          </a:xfrm>
+          <a:prstGeom prst="rect">
+            <a:avLst/>
+          </a:prstGeom>
+          <a:noFill/>
+        </p:spPr>
+        <p:txBody>
+          <a:bodyPr wrap="square">
+            <a:spAutoFit/>
+          </a:bodyPr>
+          <a:lstStyle/>
+          <a:p>
+            <a:pPr algn="ctr"/>
+            <a:r>
+              <a:rPr sz="4800" b="1" i="0">
                 <a:solidFill>
                   <a:srgbClr val="FFFFFF"/>
                 </a:solidFill>
                 <a:latin typeface="Arial"/>
               </a:rPr>
               <a:t>Tua família e teus filhos</a:t>
-            </a:r>
-          </a:p>
-        </p:txBody>
-      </p:sp>
-      <p:sp>
-        <p:nvSpPr>
-          <p:cNvPr id="5" name="TextBox 4"/>
-          <p:cNvSpPr txBox="1"/>
-          <p:nvPr/>
-        </p:nvSpPr>
-        <p:spPr>
-          <a:xfrm>
-            <a:off x="594360" y="4251960"/>
-            <a:ext cx="11002975" cy="347472"/>
-          </a:xfrm>
-          <a:prstGeom prst="rect">
-            <a:avLst/>
-          </a:prstGeom>
-          <a:noFill/>
-        </p:spPr>
-        <p:txBody>
-          <a:bodyPr wrap="square">
-            <a:spAutoFit/>
-          </a:bodyPr>
-          <a:lstStyle/>
-          <a:p>
-            <a:pPr algn="ctr"/>
-            <a:r>
-              <a:rPr sz="2200" b="0" i="1">
-                <a:solidFill>
-                  <a:srgbClr val="8C8C8C"/>
-                </a:solidFill>
-                <a:latin typeface="Arial"/>
-              </a:rPr>
-              <a:t/>
             </a:r>
           </a:p>
         </p:txBody>

--- a/output_pptx/The_Blessing.pptx
+++ b/output_pptx/The_Blessing.pptx
@@ -3428,6 +3428,76 @@
           </a:p>
         </p:txBody>
       </p:sp>
+      <p:sp>
+        <p:nvSpPr>
+          <p:cNvPr id="4" name="TextBox 3"/>
+          <p:cNvSpPr txBox="1"/>
+          <p:nvPr/>
+        </p:nvSpPr>
+        <p:spPr>
+          <a:xfrm>
+            <a:off x="640080" y="4128516"/>
+            <a:ext cx="10911535" cy="310896"/>
+          </a:xfrm>
+          <a:prstGeom prst="rect">
+            <a:avLst/>
+          </a:prstGeom>
+          <a:noFill/>
+        </p:spPr>
+        <p:txBody>
+          <a:bodyPr wrap="square">
+            <a:spAutoFit/>
+          </a:bodyPr>
+          <a:lstStyle/>
+          <a:p>
+            <a:pPr algn="ctr"/>
+            <a:r>
+              <a:rPr sz="2000" b="0" i="0">
+                <a:solidFill>
+                  <a:srgbClr val="828282"/>
+                </a:solidFill>
+                <a:latin typeface="Arial"/>
+              </a:rPr>
+              <a:t>そしてあなたの子どもたちの子どもたちに</a:t>
+            </a:r>
+          </a:p>
+        </p:txBody>
+      </p:sp>
+      <p:sp>
+        <p:nvSpPr>
+          <p:cNvPr id="5" name="TextBox 4"/>
+          <p:cNvSpPr txBox="1"/>
+          <p:nvPr/>
+        </p:nvSpPr>
+        <p:spPr>
+          <a:xfrm>
+            <a:off x="640080" y="4494276"/>
+            <a:ext cx="10911535" cy="310896"/>
+          </a:xfrm>
+          <a:prstGeom prst="rect">
+            <a:avLst/>
+          </a:prstGeom>
+          <a:noFill/>
+        </p:spPr>
+        <p:txBody>
+          <a:bodyPr wrap="square">
+            <a:spAutoFit/>
+          </a:bodyPr>
+          <a:lstStyle/>
+          <a:p>
+            <a:pPr algn="ctr"/>
+            <a:r>
+              <a:rPr sz="2000" b="0" i="0">
+                <a:solidFill>
+                  <a:srgbClr val="828282"/>
+                </a:solidFill>
+                <a:latin typeface="Arial"/>
+              </a:rPr>
+              <a:t>主の臨在があなたに伴いますように</a:t>
+            </a:r>
+          </a:p>
+        </p:txBody>
+      </p:sp>
     </p:spTree>
   </p:cSld>
   <p:clrMapOvr>
@@ -3489,6 +3559,41 @@
           </a:p>
         </p:txBody>
       </p:sp>
+      <p:sp>
+        <p:nvSpPr>
+          <p:cNvPr id="3" name="TextBox 2"/>
+          <p:cNvSpPr txBox="1"/>
+          <p:nvPr/>
+        </p:nvSpPr>
+        <p:spPr>
+          <a:xfrm>
+            <a:off x="640080" y="3845052"/>
+            <a:ext cx="10911535" cy="310896"/>
+          </a:xfrm>
+          <a:prstGeom prst="rect">
+            <a:avLst/>
+          </a:prstGeom>
+          <a:noFill/>
+        </p:spPr>
+        <p:txBody>
+          <a:bodyPr wrap="square">
+            <a:spAutoFit/>
+          </a:bodyPr>
+          <a:lstStyle/>
+          <a:p>
+            <a:pPr algn="ctr"/>
+            <a:r>
+              <a:rPr sz="2000" b="0" i="0">
+                <a:solidFill>
+                  <a:srgbClr val="828282"/>
+                </a:solidFill>
+                <a:latin typeface="Arial"/>
+              </a:rPr>
+              <a:t>後ろからも前からも</a:t>
+            </a:r>
+          </a:p>
+        </p:txBody>
+      </p:sp>
     </p:spTree>
   </p:cSld>
   <p:clrMapOvr>
@@ -3585,6 +3690,76 @@
           </a:p>
         </p:txBody>
       </p:sp>
+      <p:sp>
+        <p:nvSpPr>
+          <p:cNvPr id="4" name="TextBox 3"/>
+          <p:cNvSpPr txBox="1"/>
+          <p:nvPr/>
+        </p:nvSpPr>
+        <p:spPr>
+          <a:xfrm>
+            <a:off x="640080" y="4128516"/>
+            <a:ext cx="10911535" cy="310896"/>
+          </a:xfrm>
+          <a:prstGeom prst="rect">
+            <a:avLst/>
+          </a:prstGeom>
+          <a:noFill/>
+        </p:spPr>
+        <p:txBody>
+          <a:bodyPr wrap="square">
+            <a:spAutoFit/>
+          </a:bodyPr>
+          <a:lstStyle/>
+          <a:p>
+            <a:pPr algn="ctr"/>
+            <a:r>
+              <a:rPr sz="2000" b="0" i="0">
+                <a:solidFill>
+                  <a:srgbClr val="828282"/>
+                </a:solidFill>
+                <a:latin typeface="Arial"/>
+              </a:rPr>
+              <a:t>主があなたを祝福しますように</a:t>
+            </a:r>
+          </a:p>
+        </p:txBody>
+      </p:sp>
+      <p:sp>
+        <p:nvSpPr>
+          <p:cNvPr id="5" name="TextBox 4"/>
+          <p:cNvSpPr txBox="1"/>
+          <p:nvPr/>
+        </p:nvSpPr>
+        <p:spPr>
+          <a:xfrm>
+            <a:off x="640080" y="4494276"/>
+            <a:ext cx="10911535" cy="310896"/>
+          </a:xfrm>
+          <a:prstGeom prst="rect">
+            <a:avLst/>
+          </a:prstGeom>
+          <a:noFill/>
+        </p:spPr>
+        <p:txBody>
+          <a:bodyPr wrap="square">
+            <a:spAutoFit/>
+          </a:bodyPr>
+          <a:lstStyle/>
+          <a:p>
+            <a:pPr algn="ctr"/>
+            <a:r>
+              <a:rPr sz="2000" b="0" i="0">
+                <a:solidFill>
+                  <a:srgbClr val="828282"/>
+                </a:solidFill>
+                <a:latin typeface="Arial"/>
+              </a:rPr>
+              <a:t>主の顔があなたの上に輝きますように</a:t>
+            </a:r>
+          </a:p>
+        </p:txBody>
+      </p:sp>
     </p:spTree>
   </p:cSld>
   <p:clrMapOvr>
@@ -3681,6 +3856,76 @@
           </a:p>
         </p:txBody>
       </p:sp>
+      <p:sp>
+        <p:nvSpPr>
+          <p:cNvPr id="4" name="TextBox 3"/>
+          <p:cNvSpPr txBox="1"/>
+          <p:nvPr/>
+        </p:nvSpPr>
+        <p:spPr>
+          <a:xfrm>
+            <a:off x="640080" y="4128516"/>
+            <a:ext cx="10911535" cy="310896"/>
+          </a:xfrm>
+          <a:prstGeom prst="rect">
+            <a:avLst/>
+          </a:prstGeom>
+          <a:noFill/>
+        </p:spPr>
+        <p:txBody>
+          <a:bodyPr wrap="square">
+            <a:spAutoFit/>
+          </a:bodyPr>
+          <a:lstStyle/>
+          <a:p>
+            <a:pPr algn="ctr"/>
+            <a:r>
+              <a:rPr sz="2000" b="0" i="0">
+                <a:solidFill>
+                  <a:srgbClr val="828282"/>
+                </a:solidFill>
+                <a:latin typeface="Arial"/>
+              </a:rPr>
+              <a:t>主の恵みを与え、あなたに平安をくださいますように</a:t>
+            </a:r>
+          </a:p>
+        </p:txBody>
+      </p:sp>
+      <p:sp>
+        <p:nvSpPr>
+          <p:cNvPr id="5" name="TextBox 4"/>
+          <p:cNvSpPr txBox="1"/>
+          <p:nvPr/>
+        </p:nvSpPr>
+        <p:spPr>
+          <a:xfrm>
+            <a:off x="640080" y="4494276"/>
+            <a:ext cx="10911535" cy="310896"/>
+          </a:xfrm>
+          <a:prstGeom prst="rect">
+            <a:avLst/>
+          </a:prstGeom>
+          <a:noFill/>
+        </p:spPr>
+        <p:txBody>
+          <a:bodyPr wrap="square">
+            <a:spAutoFit/>
+          </a:bodyPr>
+          <a:lstStyle/>
+          <a:p>
+            <a:pPr algn="ctr"/>
+            <a:r>
+              <a:rPr sz="2000" b="0" i="0">
+                <a:solidFill>
+                  <a:srgbClr val="828282"/>
+                </a:solidFill>
+                <a:latin typeface="Arial"/>
+              </a:rPr>
+              <a:t>祝福が注ぎ出されますように</a:t>
+            </a:r>
+          </a:p>
+        </p:txBody>
+      </p:sp>
     </p:spTree>
   </p:cSld>
   <p:clrMapOvr>
@@ -3777,6 +4022,76 @@
           </a:p>
         </p:txBody>
       </p:sp>
+      <p:sp>
+        <p:nvSpPr>
+          <p:cNvPr id="4" name="TextBox 3"/>
+          <p:cNvSpPr txBox="1"/>
+          <p:nvPr/>
+        </p:nvSpPr>
+        <p:spPr>
+          <a:xfrm>
+            <a:off x="640080" y="4128516"/>
+            <a:ext cx="10911535" cy="310896"/>
+          </a:xfrm>
+          <a:prstGeom prst="rect">
+            <a:avLst/>
+          </a:prstGeom>
+          <a:noFill/>
+        </p:spPr>
+        <p:txBody>
+          <a:bodyPr wrap="square">
+            <a:spAutoFit/>
+          </a:bodyPr>
+          <a:lstStyle/>
+          <a:p>
+            <a:pPr algn="ctr"/>
+            <a:r>
+              <a:rPr sz="2000" b="0" i="0">
+                <a:solidFill>
+                  <a:srgbClr val="828282"/>
+                </a:solidFill>
+                <a:latin typeface="Arial"/>
+              </a:rPr>
+              <a:t>夜も昼も</a:t>
+            </a:r>
+          </a:p>
+        </p:txBody>
+      </p:sp>
+      <p:sp>
+        <p:nvSpPr>
+          <p:cNvPr id="5" name="TextBox 4"/>
+          <p:cNvSpPr txBox="1"/>
+          <p:nvPr/>
+        </p:nvSpPr>
+        <p:spPr>
+          <a:xfrm>
+            <a:off x="640080" y="4494276"/>
+            <a:ext cx="10911535" cy="310896"/>
+          </a:xfrm>
+          <a:prstGeom prst="rect">
+            <a:avLst/>
+          </a:prstGeom>
+          <a:noFill/>
+        </p:spPr>
+        <p:txBody>
+          <a:bodyPr wrap="square">
+            <a:spAutoFit/>
+          </a:bodyPr>
+          <a:lstStyle/>
+          <a:p>
+            <a:pPr algn="ctr"/>
+            <a:r>
+              <a:rPr sz="2000" b="0" i="0">
+                <a:solidFill>
+                  <a:srgbClr val="828282"/>
+                </a:solidFill>
+                <a:latin typeface="Arial"/>
+              </a:rPr>
+              <a:t>あなたの出入りを</a:t>
+            </a:r>
+          </a:p>
+        </p:txBody>
+      </p:sp>
     </p:spTree>
   </p:cSld>
   <p:clrMapOvr>
@@ -3873,6 +4188,76 @@
           </a:p>
         </p:txBody>
       </p:sp>
+      <p:sp>
+        <p:nvSpPr>
+          <p:cNvPr id="4" name="TextBox 3"/>
+          <p:cNvSpPr txBox="1"/>
+          <p:nvPr/>
+        </p:nvSpPr>
+        <p:spPr>
+          <a:xfrm>
+            <a:off x="640080" y="4128516"/>
+            <a:ext cx="10911535" cy="310896"/>
+          </a:xfrm>
+          <a:prstGeom prst="rect">
+            <a:avLst/>
+          </a:prstGeom>
+          <a:noFill/>
+        </p:spPr>
+        <p:txBody>
+          <a:bodyPr wrap="square">
+            <a:spAutoFit/>
+          </a:bodyPr>
+          <a:lstStyle/>
+          <a:p>
+            <a:pPr algn="ctr"/>
+            <a:r>
+              <a:rPr sz="2000" b="0" i="0">
+                <a:solidFill>
+                  <a:srgbClr val="828282"/>
+                </a:solidFill>
+                <a:latin typeface="Arial"/>
+              </a:rPr>
+              <a:t>あなたの笑いの中に、あなたの涙の中に</a:t>
+            </a:r>
+          </a:p>
+        </p:txBody>
+      </p:sp>
+      <p:sp>
+        <p:nvSpPr>
+          <p:cNvPr id="5" name="TextBox 4"/>
+          <p:cNvSpPr txBox="1"/>
+          <p:nvPr/>
+        </p:nvSpPr>
+        <p:spPr>
+          <a:xfrm>
+            <a:off x="640080" y="4494276"/>
+            <a:ext cx="10911535" cy="310896"/>
+          </a:xfrm>
+          <a:prstGeom prst="rect">
+            <a:avLst/>
+          </a:prstGeom>
+          <a:noFill/>
+        </p:spPr>
+        <p:txBody>
+          <a:bodyPr wrap="square">
+            <a:spAutoFit/>
+          </a:bodyPr>
+          <a:lstStyle/>
+          <a:p>
+            <a:pPr algn="ctr"/>
+            <a:r>
+              <a:rPr sz="2000" b="0" i="0">
+                <a:solidFill>
+                  <a:srgbClr val="828282"/>
+                </a:solidFill>
+                <a:latin typeface="Arial"/>
+              </a:rPr>
+              <a:t>あなたと共に、あなたのために</a:t>
+            </a:r>
+          </a:p>
+        </p:txBody>
+      </p:sp>
     </p:spTree>
   </p:cSld>
   <p:clrMapOvr>
@@ -4039,6 +4424,76 @@
           </a:p>
         </p:txBody>
       </p:sp>
+      <p:sp>
+        <p:nvSpPr>
+          <p:cNvPr id="6" name="TextBox 5"/>
+          <p:cNvSpPr txBox="1"/>
+          <p:nvPr/>
+        </p:nvSpPr>
+        <p:spPr>
+          <a:xfrm>
+            <a:off x="640080" y="4530852"/>
+            <a:ext cx="10911535" cy="310896"/>
+          </a:xfrm>
+          <a:prstGeom prst="rect">
+            <a:avLst/>
+          </a:prstGeom>
+          <a:noFill/>
+        </p:spPr>
+        <p:txBody>
+          <a:bodyPr wrap="square">
+            <a:spAutoFit/>
+          </a:bodyPr>
+          <a:lstStyle/>
+          <a:p>
+            <a:pPr algn="ctr"/>
+            <a:r>
+              <a:rPr sz="2000" b="0" i="1">
+                <a:solidFill>
+                  <a:srgbClr val="828282"/>
+                </a:solidFill>
+                <a:latin typeface="Arial"/>
+              </a:rPr>
+              <a:t>Família e filhos</a:t>
+            </a:r>
+          </a:p>
+        </p:txBody>
+      </p:sp>
+      <p:sp>
+        <p:nvSpPr>
+          <p:cNvPr id="7" name="TextBox 6"/>
+          <p:cNvSpPr txBox="1"/>
+          <p:nvPr/>
+        </p:nvSpPr>
+        <p:spPr>
+          <a:xfrm>
+            <a:off x="640080" y="4896612"/>
+            <a:ext cx="10911535" cy="310896"/>
+          </a:xfrm>
+          <a:prstGeom prst="rect">
+            <a:avLst/>
+          </a:prstGeom>
+          <a:noFill/>
+        </p:spPr>
+        <p:txBody>
+          <a:bodyPr wrap="square">
+            <a:spAutoFit/>
+          </a:bodyPr>
+          <a:lstStyle/>
+          <a:p>
+            <a:pPr algn="ctr"/>
+            <a:r>
+              <a:rPr sz="2000" b="0" i="1">
+                <a:solidFill>
+                  <a:srgbClr val="828282"/>
+                </a:solidFill>
+                <a:latin typeface="Arial"/>
+              </a:rPr>
+              <a:t>E os filhos deles</a:t>
+            </a:r>
+          </a:p>
+        </p:txBody>
+      </p:sp>
     </p:spTree>
   </p:cSld>
   <p:clrMapOvr>
@@ -4205,6 +4660,76 @@
           </a:p>
         </p:txBody>
       </p:sp>
+      <p:sp>
+        <p:nvSpPr>
+          <p:cNvPr id="6" name="TextBox 5"/>
+          <p:cNvSpPr txBox="1"/>
+          <p:nvPr/>
+        </p:nvSpPr>
+        <p:spPr>
+          <a:xfrm>
+            <a:off x="640080" y="4530852"/>
+            <a:ext cx="10911535" cy="310896"/>
+          </a:xfrm>
+          <a:prstGeom prst="rect">
+            <a:avLst/>
+          </a:prstGeom>
+          <a:noFill/>
+        </p:spPr>
+        <p:txBody>
+          <a:bodyPr wrap="square">
+            <a:spAutoFit/>
+          </a:bodyPr>
+          <a:lstStyle/>
+          <a:p>
+            <a:pPr algn="ctr"/>
+            <a:r>
+              <a:rPr sz="2000" b="0" i="1">
+                <a:solidFill>
+                  <a:srgbClr val="828282"/>
+                </a:solidFill>
+                <a:latin typeface="Arial"/>
+              </a:rPr>
+              <a:t>Através das gerações</a:t>
+            </a:r>
+          </a:p>
+        </p:txBody>
+      </p:sp>
+      <p:sp>
+        <p:nvSpPr>
+          <p:cNvPr id="7" name="TextBox 6"/>
+          <p:cNvSpPr txBox="1"/>
+          <p:nvPr/>
+        </p:nvSpPr>
+        <p:spPr>
+          <a:xfrm>
+            <a:off x="640080" y="4896612"/>
+            <a:ext cx="10911535" cy="310896"/>
+          </a:xfrm>
+          <a:prstGeom prst="rect">
+            <a:avLst/>
+          </a:prstGeom>
+          <a:noFill/>
+        </p:spPr>
+        <p:txBody>
+          <a:bodyPr wrap="square">
+            <a:spAutoFit/>
+          </a:bodyPr>
+          <a:lstStyle/>
+          <a:p>
+            <a:pPr algn="ctr"/>
+            <a:r>
+              <a:rPr sz="2000" b="0" i="1">
+                <a:solidFill>
+                  <a:srgbClr val="828282"/>
+                </a:solidFill>
+                <a:latin typeface="Arial"/>
+              </a:rPr>
+              <a:t>Que haja bênção</a:t>
+            </a:r>
+          </a:p>
+        </p:txBody>
+      </p:sp>
     </p:spTree>
   </p:cSld>
   <p:clrMapOvr>
@@ -4371,6 +4896,76 @@
           </a:p>
         </p:txBody>
       </p:sp>
+      <p:sp>
+        <p:nvSpPr>
+          <p:cNvPr id="6" name="TextBox 5"/>
+          <p:cNvSpPr txBox="1"/>
+          <p:nvPr/>
+        </p:nvSpPr>
+        <p:spPr>
+          <a:xfrm>
+            <a:off x="640080" y="4530852"/>
+            <a:ext cx="10911535" cy="310896"/>
+          </a:xfrm>
+          <a:prstGeom prst="rect">
+            <a:avLst/>
+          </a:prstGeom>
+          <a:noFill/>
+        </p:spPr>
+        <p:txBody>
+          <a:bodyPr wrap="square">
+            <a:spAutoFit/>
+          </a:bodyPr>
+          <a:lstStyle/>
+          <a:p>
+            <a:pPr algn="ctr"/>
+            <a:r>
+              <a:rPr sz="2000" b="0" i="1">
+                <a:solidFill>
+                  <a:srgbClr val="828282"/>
+                </a:solidFill>
+                <a:latin typeface="Arial"/>
+              </a:rPr>
+              <a:t>Envolvidos pela Tua presença</a:t>
+            </a:r>
+          </a:p>
+        </p:txBody>
+      </p:sp>
+      <p:sp>
+        <p:nvSpPr>
+          <p:cNvPr id="7" name="TextBox 6"/>
+          <p:cNvSpPr txBox="1"/>
+          <p:nvPr/>
+        </p:nvSpPr>
+        <p:spPr>
+          <a:xfrm>
+            <a:off x="640080" y="4896612"/>
+            <a:ext cx="10911535" cy="310896"/>
+          </a:xfrm>
+          <a:prstGeom prst="rect">
+            <a:avLst/>
+          </a:prstGeom>
+          <a:noFill/>
+        </p:spPr>
+        <p:txBody>
+          <a:bodyPr wrap="square">
+            <a:spAutoFit/>
+          </a:bodyPr>
+          <a:lstStyle/>
+          <a:p>
+            <a:pPr algn="ctr"/>
+            <a:r>
+              <a:rPr sz="2000" b="0" i="1">
+                <a:solidFill>
+                  <a:srgbClr val="828282"/>
+                </a:solidFill>
+                <a:latin typeface="Arial"/>
+              </a:rPr>
+              <a:t>Cheios do Espírito do Senhor</a:t>
+            </a:r>
+          </a:p>
+        </p:txBody>
+      </p:sp>
     </p:spTree>
   </p:cSld>
   <p:clrMapOvr>
@@ -4537,6 +5132,76 @@
           </a:p>
         </p:txBody>
       </p:sp>
+      <p:sp>
+        <p:nvSpPr>
+          <p:cNvPr id="6" name="TextBox 5"/>
+          <p:cNvSpPr txBox="1"/>
+          <p:nvPr/>
+        </p:nvSpPr>
+        <p:spPr>
+          <a:xfrm>
+            <a:off x="640080" y="4530852"/>
+            <a:ext cx="10911535" cy="310896"/>
+          </a:xfrm>
+          <a:prstGeom prst="rect">
+            <a:avLst/>
+          </a:prstGeom>
+          <a:noFill/>
+        </p:spPr>
+        <p:txBody>
+          <a:bodyPr wrap="square">
+            <a:spAutoFit/>
+          </a:bodyPr>
+          <a:lstStyle/>
+          <a:p>
+            <a:pPr algn="ctr"/>
+            <a:r>
+              <a:rPr sz="2000" b="0" i="1">
+                <a:solidFill>
+                  <a:srgbClr val="828282"/>
+                </a:solidFill>
+                <a:latin typeface="Arial"/>
+              </a:rPr>
+              <a:t>Juntos para sempre</a:t>
+            </a:r>
+          </a:p>
+        </p:txBody>
+      </p:sp>
+      <p:sp>
+        <p:nvSpPr>
+          <p:cNvPr id="7" name="TextBox 6"/>
+          <p:cNvSpPr txBox="1"/>
+          <p:nvPr/>
+        </p:nvSpPr>
+        <p:spPr>
+          <a:xfrm>
+            <a:off x="640080" y="4896612"/>
+            <a:ext cx="10911535" cy="310896"/>
+          </a:xfrm>
+          <a:prstGeom prst="rect">
+            <a:avLst/>
+          </a:prstGeom>
+          <a:noFill/>
+        </p:spPr>
+        <p:txBody>
+          <a:bodyPr wrap="square">
+            <a:spAutoFit/>
+          </a:bodyPr>
+          <a:lstStyle/>
+          <a:p>
+            <a:pPr algn="ctr"/>
+            <a:r>
+              <a:rPr sz="2000" b="0" i="1">
+                <a:solidFill>
+                  <a:srgbClr val="828282"/>
+                </a:solidFill>
+                <a:latin typeface="Arial"/>
+              </a:rPr>
+              <a:t>Que o Senhor esteja conosco</a:t>
+            </a:r>
+          </a:p>
+        </p:txBody>
+      </p:sp>
     </p:spTree>
   </p:cSld>
   <p:clrMapOvr>
@@ -4834,6 +5499,76 @@
           </a:p>
         </p:txBody>
       </p:sp>
+      <p:sp>
+        <p:nvSpPr>
+          <p:cNvPr id="6" name="TextBox 5"/>
+          <p:cNvSpPr txBox="1"/>
+          <p:nvPr/>
+        </p:nvSpPr>
+        <p:spPr>
+          <a:xfrm>
+            <a:off x="640080" y="4530852"/>
+            <a:ext cx="10911535" cy="310896"/>
+          </a:xfrm>
+          <a:prstGeom prst="rect">
+            <a:avLst/>
+          </a:prstGeom>
+          <a:noFill/>
+        </p:spPr>
+        <p:txBody>
+          <a:bodyPr wrap="square">
+            <a:spAutoFit/>
+          </a:bodyPr>
+          <a:lstStyle/>
+          <a:p>
+            <a:pPr algn="ctr"/>
+            <a:r>
+              <a:rPr sz="2000" b="0" i="1">
+                <a:solidFill>
+                  <a:srgbClr val="828282"/>
+                </a:solidFill>
+                <a:latin typeface="Arial"/>
+              </a:rPr>
+              <a:t>Em todo tempo e lugar</a:t>
+            </a:r>
+          </a:p>
+        </p:txBody>
+      </p:sp>
+      <p:sp>
+        <p:nvSpPr>
+          <p:cNvPr id="7" name="TextBox 6"/>
+          <p:cNvSpPr txBox="1"/>
+          <p:nvPr/>
+        </p:nvSpPr>
+        <p:spPr>
+          <a:xfrm>
+            <a:off x="640080" y="4896612"/>
+            <a:ext cx="10911535" cy="310896"/>
+          </a:xfrm>
+          <a:prstGeom prst="rect">
+            <a:avLst/>
+          </a:prstGeom>
+          <a:noFill/>
+        </p:spPr>
+        <p:txBody>
+          <a:bodyPr wrap="square">
+            <a:spAutoFit/>
+          </a:bodyPr>
+          <a:lstStyle/>
+          <a:p>
+            <a:pPr algn="ctr"/>
+            <a:r>
+              <a:rPr sz="2000" b="0" i="1">
+                <a:solidFill>
+                  <a:srgbClr val="828282"/>
+                </a:solidFill>
+                <a:latin typeface="Arial"/>
+              </a:rPr>
+              <a:t>Nos tempos de alegria</a:t>
+            </a:r>
+          </a:p>
+        </p:txBody>
+      </p:sp>
     </p:spTree>
   </p:cSld>
   <p:clrMapOvr>
@@ -5000,6 +5735,76 @@
           </a:p>
         </p:txBody>
       </p:sp>
+      <p:sp>
+        <p:nvSpPr>
+          <p:cNvPr id="6" name="TextBox 5"/>
+          <p:cNvSpPr txBox="1"/>
+          <p:nvPr/>
+        </p:nvSpPr>
+        <p:spPr>
+          <a:xfrm>
+            <a:off x="640080" y="4530852"/>
+            <a:ext cx="10911535" cy="310896"/>
+          </a:xfrm>
+          <a:prstGeom prst="rect">
+            <a:avLst/>
+          </a:prstGeom>
+          <a:noFill/>
+        </p:spPr>
+        <p:txBody>
+          <a:bodyPr wrap="square">
+            <a:spAutoFit/>
+          </a:bodyPr>
+          <a:lstStyle/>
+          <a:p>
+            <a:pPr algn="ctr"/>
+            <a:r>
+              <a:rPr sz="2000" b="0" i="1">
+                <a:solidFill>
+                  <a:srgbClr val="828282"/>
+                </a:solidFill>
+                <a:latin typeface="Arial"/>
+              </a:rPr>
+              <a:t>Também nos tempos de lágrimas</a:t>
+            </a:r>
+          </a:p>
+        </p:txBody>
+      </p:sp>
+      <p:sp>
+        <p:nvSpPr>
+          <p:cNvPr id="7" name="TextBox 6"/>
+          <p:cNvSpPr txBox="1"/>
+          <p:nvPr/>
+        </p:nvSpPr>
+        <p:spPr>
+          <a:xfrm>
+            <a:off x="640080" y="4896612"/>
+            <a:ext cx="10911535" cy="310896"/>
+          </a:xfrm>
+          <a:prstGeom prst="rect">
+            <a:avLst/>
+          </a:prstGeom>
+          <a:noFill/>
+        </p:spPr>
+        <p:txBody>
+          <a:bodyPr wrap="square">
+            <a:spAutoFit/>
+          </a:bodyPr>
+          <a:lstStyle/>
+          <a:p>
+            <a:pPr algn="ctr"/>
+            <a:r>
+              <a:rPr sz="2000" b="0" i="1">
+                <a:solidFill>
+                  <a:srgbClr val="828282"/>
+                </a:solidFill>
+                <a:latin typeface="Arial"/>
+              </a:rPr>
+              <a:t>O Senhor é eterno</a:t>
+            </a:r>
+          </a:p>
+        </p:txBody>
+      </p:sp>
     </p:spTree>
   </p:cSld>
   <p:clrMapOvr>
@@ -5166,6 +5971,76 @@
           </a:p>
         </p:txBody>
       </p:sp>
+      <p:sp>
+        <p:nvSpPr>
+          <p:cNvPr id="6" name="TextBox 5"/>
+          <p:cNvSpPr txBox="1"/>
+          <p:nvPr/>
+        </p:nvSpPr>
+        <p:spPr>
+          <a:xfrm>
+            <a:off x="640080" y="4530852"/>
+            <a:ext cx="10911535" cy="310896"/>
+          </a:xfrm>
+          <a:prstGeom prst="rect">
+            <a:avLst/>
+          </a:prstGeom>
+          <a:noFill/>
+        </p:spPr>
+        <p:txBody>
+          <a:bodyPr wrap="square">
+            <a:spAutoFit/>
+          </a:bodyPr>
+          <a:lstStyle/>
+          <a:p>
+            <a:pPr algn="ctr"/>
+            <a:r>
+              <a:rPr sz="2000" b="0" i="1">
+                <a:solidFill>
+                  <a:srgbClr val="828282"/>
+                </a:solidFill>
+                <a:latin typeface="Arial"/>
+              </a:rPr>
+              <a:t>Teu aliado</a:t>
+            </a:r>
+          </a:p>
+        </p:txBody>
+      </p:sp>
+      <p:sp>
+        <p:nvSpPr>
+          <p:cNvPr id="7" name="TextBox 6"/>
+          <p:cNvSpPr txBox="1"/>
+          <p:nvPr/>
+        </p:nvSpPr>
+        <p:spPr>
+          <a:xfrm>
+            <a:off x="640080" y="4896612"/>
+            <a:ext cx="10911535" cy="310896"/>
+          </a:xfrm>
+          <a:prstGeom prst="rect">
+            <a:avLst/>
+          </a:prstGeom>
+          <a:noFill/>
+        </p:spPr>
+        <p:txBody>
+          <a:bodyPr wrap="square">
+            <a:spAutoFit/>
+          </a:bodyPr>
+          <a:lstStyle/>
+          <a:p>
+            <a:pPr algn="ctr"/>
+            <a:r>
+              <a:rPr sz="2000" b="0" i="1">
+                <a:solidFill>
+                  <a:srgbClr val="828282"/>
+                </a:solidFill>
+                <a:latin typeface="Arial"/>
+              </a:rPr>
+              <a:t>Teu aliado</a:t>
+            </a:r>
+          </a:p>
+        </p:txBody>
+      </p:sp>
     </p:spTree>
   </p:cSld>
   <p:clrMapOvr>
@@ -5262,6 +6137,41 @@
           </a:p>
         </p:txBody>
       </p:sp>
+      <p:sp>
+        <p:nvSpPr>
+          <p:cNvPr id="4" name="TextBox 3"/>
+          <p:cNvSpPr txBox="1"/>
+          <p:nvPr/>
+        </p:nvSpPr>
+        <p:spPr>
+          <a:xfrm>
+            <a:off x="640080" y="4046220"/>
+            <a:ext cx="10911535" cy="310896"/>
+          </a:xfrm>
+          <a:prstGeom prst="rect">
+            <a:avLst/>
+          </a:prstGeom>
+          <a:noFill/>
+        </p:spPr>
+        <p:txBody>
+          <a:bodyPr wrap="square">
+            <a:spAutoFit/>
+          </a:bodyPr>
+          <a:lstStyle/>
+          <a:p>
+            <a:pPr algn="ctr"/>
+            <a:r>
+              <a:rPr sz="2000" b="0" i="1">
+                <a:solidFill>
+                  <a:srgbClr val="828282"/>
+                </a:solidFill>
+                <a:latin typeface="Arial"/>
+              </a:rPr>
+              <a:t>Teu aliado</a:t>
+            </a:r>
+          </a:p>
+        </p:txBody>
+      </p:sp>
     </p:spTree>
   </p:cSld>
   <p:clrMapOvr>
@@ -5358,6 +6268,76 @@
           </a:p>
         </p:txBody>
       </p:sp>
+      <p:sp>
+        <p:nvSpPr>
+          <p:cNvPr id="4" name="TextBox 3"/>
+          <p:cNvSpPr txBox="1"/>
+          <p:nvPr/>
+        </p:nvSpPr>
+        <p:spPr>
+          <a:xfrm>
+            <a:off x="640080" y="4128516"/>
+            <a:ext cx="10911535" cy="310896"/>
+          </a:xfrm>
+          <a:prstGeom prst="rect">
+            <a:avLst/>
+          </a:prstGeom>
+          <a:noFill/>
+        </p:spPr>
+        <p:txBody>
+          <a:bodyPr wrap="square">
+            <a:spAutoFit/>
+          </a:bodyPr>
+          <a:lstStyle/>
+          <a:p>
+            <a:pPr algn="ctr"/>
+            <a:r>
+              <a:rPr sz="2000" b="0" i="0">
+                <a:solidFill>
+                  <a:srgbClr val="828282"/>
+                </a:solidFill>
+                <a:latin typeface="Arial"/>
+              </a:rPr>
+              <a:t>主があなたを祝福しますように</a:t>
+            </a:r>
+          </a:p>
+        </p:txBody>
+      </p:sp>
+      <p:sp>
+        <p:nvSpPr>
+          <p:cNvPr id="5" name="TextBox 4"/>
+          <p:cNvSpPr txBox="1"/>
+          <p:nvPr/>
+        </p:nvSpPr>
+        <p:spPr>
+          <a:xfrm>
+            <a:off x="640080" y="4494276"/>
+            <a:ext cx="10911535" cy="310896"/>
+          </a:xfrm>
+          <a:prstGeom prst="rect">
+            <a:avLst/>
+          </a:prstGeom>
+          <a:noFill/>
+        </p:spPr>
+        <p:txBody>
+          <a:bodyPr wrap="square">
+            <a:spAutoFit/>
+          </a:bodyPr>
+          <a:lstStyle/>
+          <a:p>
+            <a:pPr algn="ctr"/>
+            <a:r>
+              <a:rPr sz="2000" b="0" i="0">
+                <a:solidFill>
+                  <a:srgbClr val="828282"/>
+                </a:solidFill>
+                <a:latin typeface="Arial"/>
+              </a:rPr>
+              <a:t>主の顔があなたの上に輝きますように</a:t>
+            </a:r>
+          </a:p>
+        </p:txBody>
+      </p:sp>
     </p:spTree>
   </p:cSld>
   <p:clrMapOvr>
@@ -5454,6 +6434,76 @@
           </a:p>
         </p:txBody>
       </p:sp>
+      <p:sp>
+        <p:nvSpPr>
+          <p:cNvPr id="4" name="TextBox 3"/>
+          <p:cNvSpPr txBox="1"/>
+          <p:nvPr/>
+        </p:nvSpPr>
+        <p:spPr>
+          <a:xfrm>
+            <a:off x="640080" y="4128516"/>
+            <a:ext cx="10911535" cy="310896"/>
+          </a:xfrm>
+          <a:prstGeom prst="rect">
+            <a:avLst/>
+          </a:prstGeom>
+          <a:noFill/>
+        </p:spPr>
+        <p:txBody>
+          <a:bodyPr wrap="square">
+            <a:spAutoFit/>
+          </a:bodyPr>
+          <a:lstStyle/>
+          <a:p>
+            <a:pPr algn="ctr"/>
+            <a:r>
+              <a:rPr sz="2000" b="0" i="0">
+                <a:solidFill>
+                  <a:srgbClr val="828282"/>
+                </a:solidFill>
+                <a:latin typeface="Arial"/>
+              </a:rPr>
+              <a:t>主の恵みを与え、あなたに平安をくださいますように</a:t>
+            </a:r>
+          </a:p>
+        </p:txBody>
+      </p:sp>
+      <p:sp>
+        <p:nvSpPr>
+          <p:cNvPr id="5" name="TextBox 4"/>
+          <p:cNvSpPr txBox="1"/>
+          <p:nvPr/>
+        </p:nvSpPr>
+        <p:spPr>
+          <a:xfrm>
+            <a:off x="640080" y="4494276"/>
+            <a:ext cx="10911535" cy="310896"/>
+          </a:xfrm>
+          <a:prstGeom prst="rect">
+            <a:avLst/>
+          </a:prstGeom>
+          <a:noFill/>
+        </p:spPr>
+        <p:txBody>
+          <a:bodyPr wrap="square">
+            <a:spAutoFit/>
+          </a:bodyPr>
+          <a:lstStyle/>
+          <a:p>
+            <a:pPr algn="ctr"/>
+            <a:r>
+              <a:rPr sz="2000" b="0" i="0">
+                <a:solidFill>
+                  <a:srgbClr val="828282"/>
+                </a:solidFill>
+                <a:latin typeface="Arial"/>
+              </a:rPr>
+              <a:t>祝福が注ぎ出されますように</a:t>
+            </a:r>
+          </a:p>
+        </p:txBody>
+      </p:sp>
     </p:spTree>
   </p:cSld>
   <p:clrMapOvr>
@@ -5550,6 +6600,76 @@
           </a:p>
         </p:txBody>
       </p:sp>
+      <p:sp>
+        <p:nvSpPr>
+          <p:cNvPr id="4" name="TextBox 3"/>
+          <p:cNvSpPr txBox="1"/>
+          <p:nvPr/>
+        </p:nvSpPr>
+        <p:spPr>
+          <a:xfrm>
+            <a:off x="640080" y="4128516"/>
+            <a:ext cx="10911535" cy="310896"/>
+          </a:xfrm>
+          <a:prstGeom prst="rect">
+            <a:avLst/>
+          </a:prstGeom>
+          <a:noFill/>
+        </p:spPr>
+        <p:txBody>
+          <a:bodyPr wrap="square">
+            <a:spAutoFit/>
+          </a:bodyPr>
+          <a:lstStyle/>
+          <a:p>
+            <a:pPr algn="ctr"/>
+            <a:r>
+              <a:rPr sz="2000" b="0" i="0">
+                <a:solidFill>
+                  <a:srgbClr val="828282"/>
+                </a:solidFill>
+                <a:latin typeface="Arial"/>
+              </a:rPr>
+              <a:t>夜も昼も</a:t>
+            </a:r>
+          </a:p>
+        </p:txBody>
+      </p:sp>
+      <p:sp>
+        <p:nvSpPr>
+          <p:cNvPr id="5" name="TextBox 4"/>
+          <p:cNvSpPr txBox="1"/>
+          <p:nvPr/>
+        </p:nvSpPr>
+        <p:spPr>
+          <a:xfrm>
+            <a:off x="640080" y="4494276"/>
+            <a:ext cx="10911535" cy="310896"/>
+          </a:xfrm>
+          <a:prstGeom prst="rect">
+            <a:avLst/>
+          </a:prstGeom>
+          <a:noFill/>
+        </p:spPr>
+        <p:txBody>
+          <a:bodyPr wrap="square">
+            <a:spAutoFit/>
+          </a:bodyPr>
+          <a:lstStyle/>
+          <a:p>
+            <a:pPr algn="ctr"/>
+            <a:r>
+              <a:rPr sz="2000" b="0" i="0">
+                <a:solidFill>
+                  <a:srgbClr val="828282"/>
+                </a:solidFill>
+                <a:latin typeface="Arial"/>
+              </a:rPr>
+              <a:t>あなたの出入りを</a:t>
+            </a:r>
+          </a:p>
+        </p:txBody>
+      </p:sp>
     </p:spTree>
   </p:cSld>
   <p:clrMapOvr>
@@ -5646,6 +6766,76 @@
           </a:p>
         </p:txBody>
       </p:sp>
+      <p:sp>
+        <p:nvSpPr>
+          <p:cNvPr id="4" name="TextBox 3"/>
+          <p:cNvSpPr txBox="1"/>
+          <p:nvPr/>
+        </p:nvSpPr>
+        <p:spPr>
+          <a:xfrm>
+            <a:off x="640080" y="4128516"/>
+            <a:ext cx="10911535" cy="310896"/>
+          </a:xfrm>
+          <a:prstGeom prst="rect">
+            <a:avLst/>
+          </a:prstGeom>
+          <a:noFill/>
+        </p:spPr>
+        <p:txBody>
+          <a:bodyPr wrap="square">
+            <a:spAutoFit/>
+          </a:bodyPr>
+          <a:lstStyle/>
+          <a:p>
+            <a:pPr algn="ctr"/>
+            <a:r>
+              <a:rPr sz="2000" b="0" i="0">
+                <a:solidFill>
+                  <a:srgbClr val="828282"/>
+                </a:solidFill>
+                <a:latin typeface="Arial"/>
+              </a:rPr>
+              <a:t>あなたの笑いの中に、あなたの涙の中に</a:t>
+            </a:r>
+          </a:p>
+        </p:txBody>
+      </p:sp>
+      <p:sp>
+        <p:nvSpPr>
+          <p:cNvPr id="5" name="TextBox 4"/>
+          <p:cNvSpPr txBox="1"/>
+          <p:nvPr/>
+        </p:nvSpPr>
+        <p:spPr>
+          <a:xfrm>
+            <a:off x="640080" y="4494276"/>
+            <a:ext cx="10911535" cy="310896"/>
+          </a:xfrm>
+          <a:prstGeom prst="rect">
+            <a:avLst/>
+          </a:prstGeom>
+          <a:noFill/>
+        </p:spPr>
+        <p:txBody>
+          <a:bodyPr wrap="square">
+            <a:spAutoFit/>
+          </a:bodyPr>
+          <a:lstStyle/>
+          <a:p>
+            <a:pPr algn="ctr"/>
+            <a:r>
+              <a:rPr sz="2000" b="0" i="0">
+                <a:solidFill>
+                  <a:srgbClr val="828282"/>
+                </a:solidFill>
+                <a:latin typeface="Arial"/>
+              </a:rPr>
+              <a:t>あなたと共に、あなたのために</a:t>
+            </a:r>
+          </a:p>
+        </p:txBody>
+      </p:sp>
     </p:spTree>
   </p:cSld>
   <p:clrMapOvr>
@@ -6109,6 +7299,76 @@
           </a:p>
         </p:txBody>
       </p:sp>
+      <p:sp>
+        <p:nvSpPr>
+          <p:cNvPr id="4" name="TextBox 3"/>
+          <p:cNvSpPr txBox="1"/>
+          <p:nvPr/>
+        </p:nvSpPr>
+        <p:spPr>
+          <a:xfrm>
+            <a:off x="640080" y="4128516"/>
+            <a:ext cx="10911535" cy="310896"/>
+          </a:xfrm>
+          <a:prstGeom prst="rect">
+            <a:avLst/>
+          </a:prstGeom>
+          <a:noFill/>
+        </p:spPr>
+        <p:txBody>
+          <a:bodyPr wrap="square">
+            <a:spAutoFit/>
+          </a:bodyPr>
+          <a:lstStyle/>
+          <a:p>
+            <a:pPr algn="ctr"/>
+            <a:r>
+              <a:rPr sz="2000" b="0" i="0">
+                <a:solidFill>
+                  <a:srgbClr val="828282"/>
+                </a:solidFill>
+                <a:latin typeface="Arial"/>
+              </a:rPr>
+              <a:t>主があなたを祝福しますように</a:t>
+            </a:r>
+          </a:p>
+        </p:txBody>
+      </p:sp>
+      <p:sp>
+        <p:nvSpPr>
+          <p:cNvPr id="5" name="TextBox 4"/>
+          <p:cNvSpPr txBox="1"/>
+          <p:nvPr/>
+        </p:nvSpPr>
+        <p:spPr>
+          <a:xfrm>
+            <a:off x="640080" y="4494276"/>
+            <a:ext cx="10911535" cy="310896"/>
+          </a:xfrm>
+          <a:prstGeom prst="rect">
+            <a:avLst/>
+          </a:prstGeom>
+          <a:noFill/>
+        </p:spPr>
+        <p:txBody>
+          <a:bodyPr wrap="square">
+            <a:spAutoFit/>
+          </a:bodyPr>
+          <a:lstStyle/>
+          <a:p>
+            <a:pPr algn="ctr"/>
+            <a:r>
+              <a:rPr sz="2000" b="0" i="0">
+                <a:solidFill>
+                  <a:srgbClr val="828282"/>
+                </a:solidFill>
+                <a:latin typeface="Arial"/>
+              </a:rPr>
+              <a:t>主の顔があなたの上に輝きますように</a:t>
+            </a:r>
+          </a:p>
+        </p:txBody>
+      </p:sp>
     </p:spTree>
   </p:cSld>
   <p:clrMapOvr>
@@ -6205,6 +7465,76 @@
           </a:p>
         </p:txBody>
       </p:sp>
+      <p:sp>
+        <p:nvSpPr>
+          <p:cNvPr id="4" name="TextBox 3"/>
+          <p:cNvSpPr txBox="1"/>
+          <p:nvPr/>
+        </p:nvSpPr>
+        <p:spPr>
+          <a:xfrm>
+            <a:off x="640080" y="4128516"/>
+            <a:ext cx="10911535" cy="310896"/>
+          </a:xfrm>
+          <a:prstGeom prst="rect">
+            <a:avLst/>
+          </a:prstGeom>
+          <a:noFill/>
+        </p:spPr>
+        <p:txBody>
+          <a:bodyPr wrap="square">
+            <a:spAutoFit/>
+          </a:bodyPr>
+          <a:lstStyle/>
+          <a:p>
+            <a:pPr algn="ctr"/>
+            <a:r>
+              <a:rPr sz="2000" b="0" i="0">
+                <a:solidFill>
+                  <a:srgbClr val="828282"/>
+                </a:solidFill>
+                <a:latin typeface="Arial"/>
+              </a:rPr>
+              <a:t>主の恵みを与え、あなたに平安をくださいますように</a:t>
+            </a:r>
+          </a:p>
+        </p:txBody>
+      </p:sp>
+      <p:sp>
+        <p:nvSpPr>
+          <p:cNvPr id="5" name="TextBox 4"/>
+          <p:cNvSpPr txBox="1"/>
+          <p:nvPr/>
+        </p:nvSpPr>
+        <p:spPr>
+          <a:xfrm>
+            <a:off x="640080" y="4494276"/>
+            <a:ext cx="10911535" cy="310896"/>
+          </a:xfrm>
+          <a:prstGeom prst="rect">
+            <a:avLst/>
+          </a:prstGeom>
+          <a:noFill/>
+        </p:spPr>
+        <p:txBody>
+          <a:bodyPr wrap="square">
+            <a:spAutoFit/>
+          </a:bodyPr>
+          <a:lstStyle/>
+          <a:p>
+            <a:pPr algn="ctr"/>
+            <a:r>
+              <a:rPr sz="2000" b="0" i="0">
+                <a:solidFill>
+                  <a:srgbClr val="828282"/>
+                </a:solidFill>
+                <a:latin typeface="Arial"/>
+              </a:rPr>
+              <a:t>祝福が注ぎ出されますように</a:t>
+            </a:r>
+          </a:p>
+        </p:txBody>
+      </p:sp>
     </p:spTree>
   </p:cSld>
   <p:clrMapOvr>
@@ -6301,6 +7631,76 @@
           </a:p>
         </p:txBody>
       </p:sp>
+      <p:sp>
+        <p:nvSpPr>
+          <p:cNvPr id="4" name="TextBox 3"/>
+          <p:cNvSpPr txBox="1"/>
+          <p:nvPr/>
+        </p:nvSpPr>
+        <p:spPr>
+          <a:xfrm>
+            <a:off x="640080" y="4128516"/>
+            <a:ext cx="10911535" cy="310896"/>
+          </a:xfrm>
+          <a:prstGeom prst="rect">
+            <a:avLst/>
+          </a:prstGeom>
+          <a:noFill/>
+        </p:spPr>
+        <p:txBody>
+          <a:bodyPr wrap="square">
+            <a:spAutoFit/>
+          </a:bodyPr>
+          <a:lstStyle/>
+          <a:p>
+            <a:pPr algn="ctr"/>
+            <a:r>
+              <a:rPr sz="2000" b="0" i="0">
+                <a:solidFill>
+                  <a:srgbClr val="828282"/>
+                </a:solidFill>
+                <a:latin typeface="Arial"/>
+              </a:rPr>
+              <a:t>夜も昼も</a:t>
+            </a:r>
+          </a:p>
+        </p:txBody>
+      </p:sp>
+      <p:sp>
+        <p:nvSpPr>
+          <p:cNvPr id="5" name="TextBox 4"/>
+          <p:cNvSpPr txBox="1"/>
+          <p:nvPr/>
+        </p:nvSpPr>
+        <p:spPr>
+          <a:xfrm>
+            <a:off x="640080" y="4494276"/>
+            <a:ext cx="10911535" cy="310896"/>
+          </a:xfrm>
+          <a:prstGeom prst="rect">
+            <a:avLst/>
+          </a:prstGeom>
+          <a:noFill/>
+        </p:spPr>
+        <p:txBody>
+          <a:bodyPr wrap="square">
+            <a:spAutoFit/>
+          </a:bodyPr>
+          <a:lstStyle/>
+          <a:p>
+            <a:pPr algn="ctr"/>
+            <a:r>
+              <a:rPr sz="2000" b="0" i="0">
+                <a:solidFill>
+                  <a:srgbClr val="828282"/>
+                </a:solidFill>
+                <a:latin typeface="Arial"/>
+              </a:rPr>
+              <a:t>あなたの出入りを</a:t>
+            </a:r>
+          </a:p>
+        </p:txBody>
+      </p:sp>
     </p:spTree>
   </p:cSld>
   <p:clrMapOvr>
@@ -6397,6 +7797,76 @@
           </a:p>
         </p:txBody>
       </p:sp>
+      <p:sp>
+        <p:nvSpPr>
+          <p:cNvPr id="4" name="TextBox 3"/>
+          <p:cNvSpPr txBox="1"/>
+          <p:nvPr/>
+        </p:nvSpPr>
+        <p:spPr>
+          <a:xfrm>
+            <a:off x="640080" y="4128516"/>
+            <a:ext cx="10911535" cy="310896"/>
+          </a:xfrm>
+          <a:prstGeom prst="rect">
+            <a:avLst/>
+          </a:prstGeom>
+          <a:noFill/>
+        </p:spPr>
+        <p:txBody>
+          <a:bodyPr wrap="square">
+            <a:spAutoFit/>
+          </a:bodyPr>
+          <a:lstStyle/>
+          <a:p>
+            <a:pPr algn="ctr"/>
+            <a:r>
+              <a:rPr sz="2000" b="0" i="0">
+                <a:solidFill>
+                  <a:srgbClr val="828282"/>
+                </a:solidFill>
+                <a:latin typeface="Arial"/>
+              </a:rPr>
+              <a:t>あなたの笑いの中に、あなたの涙の中に</a:t>
+            </a:r>
+          </a:p>
+        </p:txBody>
+      </p:sp>
+      <p:sp>
+        <p:nvSpPr>
+          <p:cNvPr id="5" name="TextBox 4"/>
+          <p:cNvSpPr txBox="1"/>
+          <p:nvPr/>
+        </p:nvSpPr>
+        <p:spPr>
+          <a:xfrm>
+            <a:off x="640080" y="4494276"/>
+            <a:ext cx="10911535" cy="310896"/>
+          </a:xfrm>
+          <a:prstGeom prst="rect">
+            <a:avLst/>
+          </a:prstGeom>
+          <a:noFill/>
+        </p:spPr>
+        <p:txBody>
+          <a:bodyPr wrap="square">
+            <a:spAutoFit/>
+          </a:bodyPr>
+          <a:lstStyle/>
+          <a:p>
+            <a:pPr algn="ctr"/>
+            <a:r>
+              <a:rPr sz="2000" b="0" i="0">
+                <a:solidFill>
+                  <a:srgbClr val="828282"/>
+                </a:solidFill>
+                <a:latin typeface="Arial"/>
+              </a:rPr>
+              <a:t>あなたと共に、あなたのために</a:t>
+            </a:r>
+          </a:p>
+        </p:txBody>
+      </p:sp>
     </p:spTree>
   </p:cSld>
   <p:clrMapOvr>
@@ -6489,6 +7959,76 @@
                 <a:latin typeface="Arial"/>
               </a:rPr>
               <a:t>Tua família e teus filhos</a:t>
+            </a:r>
+          </a:p>
+        </p:txBody>
+      </p:sp>
+      <p:sp>
+        <p:nvSpPr>
+          <p:cNvPr id="4" name="TextBox 3"/>
+          <p:cNvSpPr txBox="1"/>
+          <p:nvPr/>
+        </p:nvSpPr>
+        <p:spPr>
+          <a:xfrm>
+            <a:off x="640080" y="4128516"/>
+            <a:ext cx="10911535" cy="310896"/>
+          </a:xfrm>
+          <a:prstGeom prst="rect">
+            <a:avLst/>
+          </a:prstGeom>
+          <a:noFill/>
+        </p:spPr>
+        <p:txBody>
+          <a:bodyPr wrap="square">
+            <a:spAutoFit/>
+          </a:bodyPr>
+          <a:lstStyle/>
+          <a:p>
+            <a:pPr algn="ctr"/>
+            <a:r>
+              <a:rPr sz="2000" b="0" i="0">
+                <a:solidFill>
+                  <a:srgbClr val="828282"/>
+                </a:solidFill>
+                <a:latin typeface="Arial"/>
+              </a:rPr>
+              <a:t>千代まで</a:t>
+            </a:r>
+          </a:p>
+        </p:txBody>
+      </p:sp>
+      <p:sp>
+        <p:nvSpPr>
+          <p:cNvPr id="5" name="TextBox 4"/>
+          <p:cNvSpPr txBox="1"/>
+          <p:nvPr/>
+        </p:nvSpPr>
+        <p:spPr>
+          <a:xfrm>
+            <a:off x="640080" y="4494276"/>
+            <a:ext cx="10911535" cy="310896"/>
+          </a:xfrm>
+          <a:prstGeom prst="rect">
+            <a:avLst/>
+          </a:prstGeom>
+          <a:noFill/>
+        </p:spPr>
+        <p:txBody>
+          <a:bodyPr wrap="square">
+            <a:spAutoFit/>
+          </a:bodyPr>
+          <a:lstStyle/>
+          <a:p>
+            <a:pPr algn="ctr"/>
+            <a:r>
+              <a:rPr sz="2000" b="0" i="0">
+                <a:solidFill>
+                  <a:srgbClr val="828282"/>
+                </a:solidFill>
+                <a:latin typeface="Arial"/>
+              </a:rPr>
+              <a:t>あなたの家族とあなたの子どもたちに</a:t>
             </a:r>
           </a:p>
         </p:txBody>
